--- a/Project_Green_Teaser.pptx
+++ b/Project_Green_Teaser.pptx
@@ -1045,7 +1045,7 @@
                 <a:ea typeface="Poppins" pitchFamily="34" charset="-122"/>
                 <a:cs typeface="Poppins" pitchFamily="34" charset="-120"/>
               </a:rPr>
-              <a:t>Leading agricultural dealership</a:t>
+              <a:t>Nationwide multi-brand distribution</a:t>
             </a:r>
             <a:endParaRPr lang="en-US" sz="1000" dirty="0"/>
           </a:p>
@@ -1065,7 +1065,7 @@
                 <a:ea typeface="Poppins" pitchFamily="34" charset="-122"/>
                 <a:cs typeface="Poppins" pitchFamily="34" charset="-120"/>
               </a:rPr>
-              <a:t>Authorised dealer for a global agricultural machinery OEM across ~35% of Brazil’s sugarcane area</a:t>
+              <a:t>#2 heavy-equipment dealer in Brazil across all brands, serving eight sectors from mining to agriculture</a:t>
             </a:r>
             <a:endParaRPr lang="en-US" sz="1000" dirty="0"/>
           </a:p>
@@ -1172,7 +1172,7 @@
                 <a:ea typeface="Poppins" pitchFamily="34" charset="-122"/>
                 <a:cs typeface="Poppins" pitchFamily="34" charset="-120"/>
               </a:rPr>
-              <a:t>70% of the workforce dedicated to after-sales and technology, with +88% immediate parts availability</a:t>
+              <a:t>Two thirds of the workforce in after-sales, an ~85% absorption rate and +100k SKUs in parts e-commerce</a:t>
             </a:r>
             <a:endParaRPr lang="en-US" sz="1000" dirty="0"/>
           </a:p>
@@ -1259,7 +1259,7 @@
                 <a:ea typeface="Poppins" pitchFamily="34" charset="-122"/>
                 <a:cs typeface="Poppins" pitchFamily="34" charset="-120"/>
               </a:rPr>
-              <a:t>Technology-driven recurrence</a:t>
+              <a:t>Digital and connected operations</a:t>
             </a:r>
             <a:endParaRPr lang="en-US" sz="1000" dirty="0"/>
           </a:p>
@@ -1279,7 +1279,7 @@
                 <a:ea typeface="Poppins" pitchFamily="34" charset="-122"/>
                 <a:cs typeface="Poppins" pitchFamily="34" charset="-120"/>
               </a:rPr>
-              <a:t>4.1k connected machines and 6.1 Mn hours of machine data feeding proactive service demand</a:t>
+              <a:t>Fleet telemetry and 24/7 autonomous stores converting an installed base of +8.6k units into recurring demand</a:t>
             </a:r>
             <a:endParaRPr lang="en-US" sz="1000" dirty="0"/>
           </a:p>
@@ -1387,7 +1387,7 @@
                 <a:ea typeface="Poppins" pitchFamily="34" charset="-122"/>
                 <a:cs typeface="Poppins" pitchFamily="34" charset="-120"/>
               </a:rPr>
-              <a:t>The Company operates at the core of Brazil’s sugarcane belt,</a:t>
+              <a:t>The Company is one of Brazil’s largest equipment distributors,</a:t>
             </a:r>
             <a:endParaRPr lang="en-US" sz="1200" dirty="0"/>
           </a:p>
@@ -1407,7 +1407,7 @@
                 <a:ea typeface="Poppins" pitchFamily="34" charset="-122"/>
                 <a:cs typeface="Poppins" pitchFamily="34" charset="-120"/>
               </a:rPr>
-              <a:t>combining OEM-backed scale, 13 branches and aftermarket recurrence</a:t>
+              <a:t>combining nationwide reach with an aftermarket-led, digital operation</a:t>
             </a:r>
             <a:endParaRPr lang="en-US" sz="1200" dirty="0"/>
           </a:p>
@@ -1421,8 +1421,8 @@
         </p:nvSpPr>
         <p:spPr>
           <a:xfrm>
-            <a:off x="364846" y="3831336"/>
-            <a:ext cx="2003450" cy="320040"/>
+            <a:off x="360274" y="3831336"/>
+            <a:ext cx="1965960" cy="320040"/>
           </a:xfrm>
           <a:prstGeom prst="rect">
             <a:avLst/>
@@ -1460,8 +1460,8 @@
         </p:nvSpPr>
         <p:spPr>
           <a:xfrm>
-            <a:off x="364846" y="4114800"/>
-            <a:ext cx="2546604" cy="1609344"/>
+            <a:off x="360274" y="4114800"/>
+            <a:ext cx="1920240" cy="1481328"/>
           </a:xfrm>
           <a:prstGeom prst="rect">
             <a:avLst/>
@@ -1488,15 +1488,54 @@
                 <a:ea typeface="Poppins" pitchFamily="34" charset="-122"/>
                 <a:cs typeface="Poppins" pitchFamily="34" charset="-120"/>
               </a:rPr>
-              <a:t>Agricultural machinery dealership with 13 branches across Brazil’s Center-South, distributing and servicing equipment for sugarcane, grain, citrus and coffee producers across a 3.7 Mn hectare area, supported by +600 employees and a connected-support structure that keeps client fleets running</a:t>
+              <a:t>Multi-brand distributor of construction, mining, forestry and agricultural equipment, operating across Brazil for 59 years on an aftermarket-led model built on parts e‑commerce, fleet telemetry and 24/7 autonomous stores</a:t>
             </a:r>
             <a:endParaRPr lang="en-US" sz="1000" dirty="0"/>
+          </a:p>
+        </p:txBody>
+      </p:sp>
+      <p:sp>
+        <p:nvSpPr>
+          <p:cNvPr id="17" name="Text 14"/>
+          <p:cNvSpPr/>
+          <p:nvPr/>
+        </p:nvSpPr>
+        <p:spPr>
+          <a:xfrm>
+            <a:off x="2359152" y="3831336"/>
+            <a:ext cx="2103120" cy="320040"/>
+          </a:xfrm>
+          <a:prstGeom prst="rect">
+            <a:avLst/>
+          </a:prstGeom>
+          <a:noFill/>
+          <a:ln/>
+        </p:spPr>
+        <p:txBody>
+          <a:bodyPr wrap="square" lIns="0" tIns="0" rIns="0" bIns="0" rtlCol="0" anchor="t"/>
+          <a:lstStyle/>
+          <a:p>
+            <a:pPr indent="0" marL="0">
+              <a:buNone/>
+            </a:pPr>
+            <a:r>
+              <a:rPr lang="en-US" sz="1400" b="1" dirty="0">
+                <a:solidFill>
+                  <a:srgbClr val="222F44"/>
+                </a:solidFill>
+                <a:latin typeface="Poppins" pitchFamily="34" charset="0"/>
+                <a:ea typeface="Poppins" pitchFamily="34" charset="-122"/>
+                <a:cs typeface="Poppins" pitchFamily="34" charset="-120"/>
+              </a:rPr>
+              <a:t>Geographic Index</a:t>
+            </a:r>
+            <a:endParaRPr lang="en-US" sz="1400" dirty="0"/>
           </a:p>
         </p:txBody>
       </p:sp>
       <p:pic>
         <p:nvPicPr>
-          <p:cNvPr id="17" name="Image 1" descr="assets/green/map_brazil_gray.png">    </p:cNvPr>
+          <p:cNvPr id="18" name="Image 1" descr="assets/green/map_regions.png">    </p:cNvPr>
           <p:cNvPicPr>
             <a:picLocks noChangeAspect="1"/>
           </p:cNvPicPr>
@@ -1510,8 +1549,8 @@
         </p:blipFill>
         <p:spPr>
           <a:xfrm>
-            <a:off x="2761488" y="3913632"/>
-            <a:ext cx="1645920" cy="1544595"/>
+            <a:off x="3675888" y="4059936"/>
+            <a:ext cx="1499616" cy="1498417"/>
           </a:xfrm>
           <a:prstGeom prst="rect">
             <a:avLst/>
@@ -1520,36 +1559,919 @@
       </p:pic>
       <p:sp>
         <p:nvSpPr>
-          <p:cNvPr id="18" name="Shape 14"/>
-          <p:cNvSpPr/>
-          <p:nvPr/>
-        </p:nvSpPr>
-        <p:spPr>
-          <a:xfrm>
-            <a:off x="3615538" y="4757907"/>
-            <a:ext cx="365760" cy="365760"/>
-          </a:xfrm>
-          <a:prstGeom prst="ellipse">
-            <a:avLst/>
-          </a:prstGeom>
-          <a:ln w="19050">
+          <p:cNvPr id="19" name="Shape 15"/>
+          <p:cNvSpPr/>
+          <p:nvPr/>
+        </p:nvSpPr>
+        <p:spPr>
+          <a:xfrm>
+            <a:off x="2359152" y="4133088"/>
+            <a:ext cx="1133856" cy="141732"/>
+          </a:xfrm>
+          <a:prstGeom prst="rect">
+            <a:avLst/>
+          </a:prstGeom>
+          <a:solidFill>
+            <a:srgbClr val="DDE1E6"/>
+          </a:solidFill>
+          <a:ln/>
+        </p:spPr>
+      </p:sp>
+      <p:sp>
+        <p:nvSpPr>
+          <p:cNvPr id="20" name="Text 16"/>
+          <p:cNvSpPr/>
+          <p:nvPr/>
+        </p:nvSpPr>
+        <p:spPr>
+          <a:xfrm>
+            <a:off x="2359152" y="4133088"/>
+            <a:ext cx="1133856" cy="141732"/>
+          </a:xfrm>
+          <a:prstGeom prst="rect">
+            <a:avLst/>
+          </a:prstGeom>
+          <a:noFill/>
+          <a:ln/>
+        </p:spPr>
+        <p:txBody>
+          <a:bodyPr wrap="square" lIns="0" tIns="0" rIns="0" bIns="0" rtlCol="0" anchor="ctr"/>
+          <a:lstStyle/>
+          <a:p>
+            <a:pPr algn="ctr" indent="0" marL="0">
+              <a:buNone/>
+            </a:pPr>
+            <a:r>
+              <a:rPr lang="en-US" sz="600" b="1" dirty="0">
+                <a:solidFill>
+                  <a:srgbClr val="222F44"/>
+                </a:solidFill>
+                <a:latin typeface="Poppins" pitchFamily="34" charset="0"/>
+                <a:ea typeface="Poppins" pitchFamily="34" charset="-122"/>
+                <a:cs typeface="Poppins" pitchFamily="34" charset="-120"/>
+              </a:rPr>
+              <a:t>North and Middle West</a:t>
+            </a:r>
+            <a:endParaRPr lang="en-US" sz="600" dirty="0"/>
+          </a:p>
+        </p:txBody>
+      </p:sp>
+      <p:sp>
+        <p:nvSpPr>
+          <p:cNvPr id="21" name="Text 17"/>
+          <p:cNvSpPr/>
+          <p:nvPr/>
+        </p:nvSpPr>
+        <p:spPr>
+          <a:xfrm>
+            <a:off x="2404872" y="4311396"/>
+            <a:ext cx="1088136" cy="96012"/>
+          </a:xfrm>
+          <a:prstGeom prst="rect">
+            <a:avLst/>
+          </a:prstGeom>
+          <a:noFill/>
+          <a:ln/>
+        </p:spPr>
+        <p:txBody>
+          <a:bodyPr wrap="square" lIns="0" tIns="0" rIns="0" bIns="0" rtlCol="0" anchor="ctr"/>
+          <a:lstStyle/>
+          <a:p>
+            <a:pPr indent="0" marL="0">
+              <a:buNone/>
+            </a:pPr>
+            <a:r>
+              <a:rPr lang="en-US" sz="600" dirty="0">
+                <a:solidFill>
+                  <a:srgbClr val="222F44"/>
+                </a:solidFill>
+                <a:latin typeface="Poppins" pitchFamily="34" charset="0"/>
+                <a:ea typeface="Poppins" pitchFamily="34" charset="-122"/>
+                <a:cs typeface="Poppins" pitchFamily="34" charset="-120"/>
+              </a:rPr>
+              <a:t>Construction</a:t>
+            </a:r>
+            <a:endParaRPr lang="en-US" sz="600" dirty="0"/>
+          </a:p>
+        </p:txBody>
+      </p:sp>
+      <p:sp>
+        <p:nvSpPr>
+          <p:cNvPr id="22" name="Text 18"/>
+          <p:cNvSpPr/>
+          <p:nvPr/>
+        </p:nvSpPr>
+        <p:spPr>
+          <a:xfrm>
+            <a:off x="2404872" y="4407408"/>
+            <a:ext cx="1088136" cy="96012"/>
+          </a:xfrm>
+          <a:prstGeom prst="rect">
+            <a:avLst/>
+          </a:prstGeom>
+          <a:noFill/>
+          <a:ln/>
+        </p:spPr>
+        <p:txBody>
+          <a:bodyPr wrap="square" lIns="0" tIns="0" rIns="0" bIns="0" rtlCol="0" anchor="ctr"/>
+          <a:lstStyle/>
+          <a:p>
+            <a:pPr indent="0" marL="0">
+              <a:buNone/>
+            </a:pPr>
+            <a:r>
+              <a:rPr lang="en-US" sz="600" dirty="0">
+                <a:solidFill>
+                  <a:srgbClr val="222F44"/>
+                </a:solidFill>
+                <a:latin typeface="Poppins" pitchFamily="34" charset="0"/>
+                <a:ea typeface="Poppins" pitchFamily="34" charset="-122"/>
+                <a:cs typeface="Poppins" pitchFamily="34" charset="-120"/>
+              </a:rPr>
+              <a:t>Agriculture</a:t>
+            </a:r>
+            <a:endParaRPr lang="en-US" sz="600" dirty="0"/>
+          </a:p>
+        </p:txBody>
+      </p:sp>
+      <p:sp>
+        <p:nvSpPr>
+          <p:cNvPr id="23" name="Text 19"/>
+          <p:cNvSpPr/>
+          <p:nvPr/>
+        </p:nvSpPr>
+        <p:spPr>
+          <a:xfrm>
+            <a:off x="2404872" y="4503420"/>
+            <a:ext cx="1088136" cy="96012"/>
+          </a:xfrm>
+          <a:prstGeom prst="rect">
+            <a:avLst/>
+          </a:prstGeom>
+          <a:noFill/>
+          <a:ln/>
+        </p:spPr>
+        <p:txBody>
+          <a:bodyPr wrap="square" lIns="0" tIns="0" rIns="0" bIns="0" rtlCol="0" anchor="ctr"/>
+          <a:lstStyle/>
+          <a:p>
+            <a:pPr indent="0" marL="0">
+              <a:buNone/>
+            </a:pPr>
+            <a:r>
+              <a:rPr lang="en-US" sz="600" dirty="0">
+                <a:solidFill>
+                  <a:srgbClr val="222F44"/>
+                </a:solidFill>
+                <a:latin typeface="Poppins" pitchFamily="34" charset="0"/>
+                <a:ea typeface="Poppins" pitchFamily="34" charset="-122"/>
+                <a:cs typeface="Poppins" pitchFamily="34" charset="-120"/>
+              </a:rPr>
+              <a:t>Logistics</a:t>
+            </a:r>
+            <a:endParaRPr lang="en-US" sz="600" dirty="0"/>
+          </a:p>
+        </p:txBody>
+      </p:sp>
+      <p:sp>
+        <p:nvSpPr>
+          <p:cNvPr id="24" name="Text 20"/>
+          <p:cNvSpPr/>
+          <p:nvPr/>
+        </p:nvSpPr>
+        <p:spPr>
+          <a:xfrm>
+            <a:off x="2404872" y="4599432"/>
+            <a:ext cx="1088136" cy="96012"/>
+          </a:xfrm>
+          <a:prstGeom prst="rect">
+            <a:avLst/>
+          </a:prstGeom>
+          <a:noFill/>
+          <a:ln/>
+        </p:spPr>
+        <p:txBody>
+          <a:bodyPr wrap="square" lIns="0" tIns="0" rIns="0" bIns="0" rtlCol="0" anchor="ctr"/>
+          <a:lstStyle/>
+          <a:p>
+            <a:pPr indent="0" marL="0">
+              <a:buNone/>
+            </a:pPr>
+            <a:r>
+              <a:rPr lang="en-US" sz="600" dirty="0">
+                <a:solidFill>
+                  <a:srgbClr val="222F44"/>
+                </a:solidFill>
+                <a:latin typeface="Poppins" pitchFamily="34" charset="0"/>
+                <a:ea typeface="Poppins" pitchFamily="34" charset="-122"/>
+                <a:cs typeface="Poppins" pitchFamily="34" charset="-120"/>
+              </a:rPr>
+              <a:t>Infrastructure</a:t>
+            </a:r>
+            <a:endParaRPr lang="en-US" sz="600" dirty="0"/>
+          </a:p>
+        </p:txBody>
+      </p:sp>
+      <p:sp>
+        <p:nvSpPr>
+          <p:cNvPr id="25" name="Shape 21"/>
+          <p:cNvSpPr/>
+          <p:nvPr/>
+        </p:nvSpPr>
+        <p:spPr>
+          <a:xfrm>
+            <a:off x="5358384" y="4133088"/>
+            <a:ext cx="1133856" cy="141732"/>
+          </a:xfrm>
+          <a:prstGeom prst="rect">
+            <a:avLst/>
+          </a:prstGeom>
+          <a:solidFill>
+            <a:srgbClr val="BCC3CD"/>
+          </a:solidFill>
+          <a:ln/>
+        </p:spPr>
+      </p:sp>
+      <p:sp>
+        <p:nvSpPr>
+          <p:cNvPr id="26" name="Text 22"/>
+          <p:cNvSpPr/>
+          <p:nvPr/>
+        </p:nvSpPr>
+        <p:spPr>
+          <a:xfrm>
+            <a:off x="5358384" y="4133088"/>
+            <a:ext cx="1133856" cy="141732"/>
+          </a:xfrm>
+          <a:prstGeom prst="rect">
+            <a:avLst/>
+          </a:prstGeom>
+          <a:noFill/>
+          <a:ln/>
+        </p:spPr>
+        <p:txBody>
+          <a:bodyPr wrap="square" lIns="0" tIns="0" rIns="0" bIns="0" rtlCol="0" anchor="ctr"/>
+          <a:lstStyle/>
+          <a:p>
+            <a:pPr algn="ctr" indent="0" marL="0">
+              <a:buNone/>
+            </a:pPr>
+            <a:r>
+              <a:rPr lang="en-US" sz="600" b="1" dirty="0">
+                <a:solidFill>
+                  <a:srgbClr val="222F44"/>
+                </a:solidFill>
+                <a:latin typeface="Poppins" pitchFamily="34" charset="0"/>
+                <a:ea typeface="Poppins" pitchFamily="34" charset="-122"/>
+                <a:cs typeface="Poppins" pitchFamily="34" charset="-120"/>
+              </a:rPr>
+              <a:t>Northeast</a:t>
+            </a:r>
+            <a:endParaRPr lang="en-US" sz="600" dirty="0"/>
+          </a:p>
+        </p:txBody>
+      </p:sp>
+      <p:sp>
+        <p:nvSpPr>
+          <p:cNvPr id="27" name="Text 23"/>
+          <p:cNvSpPr/>
+          <p:nvPr/>
+        </p:nvSpPr>
+        <p:spPr>
+          <a:xfrm>
+            <a:off x="5404104" y="4311396"/>
+            <a:ext cx="1088136" cy="96012"/>
+          </a:xfrm>
+          <a:prstGeom prst="rect">
+            <a:avLst/>
+          </a:prstGeom>
+          <a:noFill/>
+          <a:ln/>
+        </p:spPr>
+        <p:txBody>
+          <a:bodyPr wrap="square" lIns="0" tIns="0" rIns="0" bIns="0" rtlCol="0" anchor="ctr"/>
+          <a:lstStyle/>
+          <a:p>
+            <a:pPr indent="0" marL="0">
+              <a:buNone/>
+            </a:pPr>
+            <a:r>
+              <a:rPr lang="en-US" sz="600" dirty="0">
+                <a:solidFill>
+                  <a:srgbClr val="222F44"/>
+                </a:solidFill>
+                <a:latin typeface="Poppins" pitchFamily="34" charset="0"/>
+                <a:ea typeface="Poppins" pitchFamily="34" charset="-122"/>
+                <a:cs typeface="Poppins" pitchFamily="34" charset="-120"/>
+              </a:rPr>
+              <a:t>Forest</a:t>
+            </a:r>
+            <a:endParaRPr lang="en-US" sz="600" dirty="0"/>
+          </a:p>
+        </p:txBody>
+      </p:sp>
+      <p:sp>
+        <p:nvSpPr>
+          <p:cNvPr id="28" name="Text 24"/>
+          <p:cNvSpPr/>
+          <p:nvPr/>
+        </p:nvSpPr>
+        <p:spPr>
+          <a:xfrm>
+            <a:off x="5404104" y="4407408"/>
+            <a:ext cx="1088136" cy="96012"/>
+          </a:xfrm>
+          <a:prstGeom prst="rect">
+            <a:avLst/>
+          </a:prstGeom>
+          <a:noFill/>
+          <a:ln/>
+        </p:spPr>
+        <p:txBody>
+          <a:bodyPr wrap="square" lIns="0" tIns="0" rIns="0" bIns="0" rtlCol="0" anchor="ctr"/>
+          <a:lstStyle/>
+          <a:p>
+            <a:pPr indent="0" marL="0">
+              <a:buNone/>
+            </a:pPr>
+            <a:r>
+              <a:rPr lang="en-US" sz="600" dirty="0">
+                <a:solidFill>
+                  <a:srgbClr val="222F44"/>
+                </a:solidFill>
+                <a:latin typeface="Poppins" pitchFamily="34" charset="0"/>
+                <a:ea typeface="Poppins" pitchFamily="34" charset="-122"/>
+                <a:cs typeface="Poppins" pitchFamily="34" charset="-120"/>
+              </a:rPr>
+              <a:t>Agriculture</a:t>
+            </a:r>
+            <a:endParaRPr lang="en-US" sz="600" dirty="0"/>
+          </a:p>
+        </p:txBody>
+      </p:sp>
+      <p:sp>
+        <p:nvSpPr>
+          <p:cNvPr id="29" name="Text 25"/>
+          <p:cNvSpPr/>
+          <p:nvPr/>
+        </p:nvSpPr>
+        <p:spPr>
+          <a:xfrm>
+            <a:off x="5404104" y="4503420"/>
+            <a:ext cx="1088136" cy="96012"/>
+          </a:xfrm>
+          <a:prstGeom prst="rect">
+            <a:avLst/>
+          </a:prstGeom>
+          <a:noFill/>
+          <a:ln/>
+        </p:spPr>
+        <p:txBody>
+          <a:bodyPr wrap="square" lIns="0" tIns="0" rIns="0" bIns="0" rtlCol="0" anchor="ctr"/>
+          <a:lstStyle/>
+          <a:p>
+            <a:pPr indent="0" marL="0">
+              <a:buNone/>
+            </a:pPr>
+            <a:r>
+              <a:rPr lang="en-US" sz="600" dirty="0">
+                <a:solidFill>
+                  <a:srgbClr val="222F44"/>
+                </a:solidFill>
+                <a:latin typeface="Poppins" pitchFamily="34" charset="0"/>
+                <a:ea typeface="Poppins" pitchFamily="34" charset="-122"/>
+                <a:cs typeface="Poppins" pitchFamily="34" charset="-120"/>
+              </a:rPr>
+              <a:t>Construction</a:t>
+            </a:r>
+            <a:endParaRPr lang="en-US" sz="600" dirty="0"/>
+          </a:p>
+        </p:txBody>
+      </p:sp>
+      <p:sp>
+        <p:nvSpPr>
+          <p:cNvPr id="30" name="Shape 26"/>
+          <p:cNvSpPr/>
+          <p:nvPr/>
+        </p:nvSpPr>
+        <p:spPr>
+          <a:xfrm>
+            <a:off x="2359152" y="4882896"/>
+            <a:ext cx="1133856" cy="141732"/>
+          </a:xfrm>
+          <a:prstGeom prst="rect">
+            <a:avLst/>
+          </a:prstGeom>
+          <a:solidFill>
+            <a:srgbClr val="E3CE93"/>
+          </a:solidFill>
+          <a:ln/>
+        </p:spPr>
+      </p:sp>
+      <p:sp>
+        <p:nvSpPr>
+          <p:cNvPr id="31" name="Text 27"/>
+          <p:cNvSpPr/>
+          <p:nvPr/>
+        </p:nvSpPr>
+        <p:spPr>
+          <a:xfrm>
+            <a:off x="2359152" y="4882896"/>
+            <a:ext cx="1133856" cy="141732"/>
+          </a:xfrm>
+          <a:prstGeom prst="rect">
+            <a:avLst/>
+          </a:prstGeom>
+          <a:noFill/>
+          <a:ln/>
+        </p:spPr>
+        <p:txBody>
+          <a:bodyPr wrap="square" lIns="0" tIns="0" rIns="0" bIns="0" rtlCol="0" anchor="ctr"/>
+          <a:lstStyle/>
+          <a:p>
+            <a:pPr algn="ctr" indent="0" marL="0">
+              <a:buNone/>
+            </a:pPr>
+            <a:r>
+              <a:rPr lang="en-US" sz="600" b="1" dirty="0">
+                <a:solidFill>
+                  <a:srgbClr val="222F44"/>
+                </a:solidFill>
+                <a:latin typeface="Poppins" pitchFamily="34" charset="0"/>
+                <a:ea typeface="Poppins" pitchFamily="34" charset="-122"/>
+                <a:cs typeface="Poppins" pitchFamily="34" charset="-120"/>
+              </a:rPr>
+              <a:t>South</a:t>
+            </a:r>
+            <a:endParaRPr lang="en-US" sz="600" dirty="0"/>
+          </a:p>
+        </p:txBody>
+      </p:sp>
+      <p:sp>
+        <p:nvSpPr>
+          <p:cNvPr id="32" name="Text 28"/>
+          <p:cNvSpPr/>
+          <p:nvPr/>
+        </p:nvSpPr>
+        <p:spPr>
+          <a:xfrm>
+            <a:off x="2404872" y="5061204"/>
+            <a:ext cx="1088136" cy="96012"/>
+          </a:xfrm>
+          <a:prstGeom prst="rect">
+            <a:avLst/>
+          </a:prstGeom>
+          <a:noFill/>
+          <a:ln/>
+        </p:spPr>
+        <p:txBody>
+          <a:bodyPr wrap="square" lIns="0" tIns="0" rIns="0" bIns="0" rtlCol="0" anchor="ctr"/>
+          <a:lstStyle/>
+          <a:p>
+            <a:pPr indent="0" marL="0">
+              <a:buNone/>
+            </a:pPr>
+            <a:r>
+              <a:rPr lang="en-US" sz="600" dirty="0">
+                <a:solidFill>
+                  <a:srgbClr val="222F44"/>
+                </a:solidFill>
+                <a:latin typeface="Poppins" pitchFamily="34" charset="0"/>
+                <a:ea typeface="Poppins" pitchFamily="34" charset="-122"/>
+                <a:cs typeface="Poppins" pitchFamily="34" charset="-120"/>
+              </a:rPr>
+              <a:t>Agriculture</a:t>
+            </a:r>
+            <a:endParaRPr lang="en-US" sz="600" dirty="0"/>
+          </a:p>
+        </p:txBody>
+      </p:sp>
+      <p:sp>
+        <p:nvSpPr>
+          <p:cNvPr id="33" name="Text 29"/>
+          <p:cNvSpPr/>
+          <p:nvPr/>
+        </p:nvSpPr>
+        <p:spPr>
+          <a:xfrm>
+            <a:off x="2404872" y="5157216"/>
+            <a:ext cx="1088136" cy="96012"/>
+          </a:xfrm>
+          <a:prstGeom prst="rect">
+            <a:avLst/>
+          </a:prstGeom>
+          <a:noFill/>
+          <a:ln/>
+        </p:spPr>
+        <p:txBody>
+          <a:bodyPr wrap="square" lIns="0" tIns="0" rIns="0" bIns="0" rtlCol="0" anchor="ctr"/>
+          <a:lstStyle/>
+          <a:p>
+            <a:pPr indent="0" marL="0">
+              <a:buNone/>
+            </a:pPr>
+            <a:r>
+              <a:rPr lang="en-US" sz="600" dirty="0">
+                <a:solidFill>
+                  <a:srgbClr val="222F44"/>
+                </a:solidFill>
+                <a:latin typeface="Poppins" pitchFamily="34" charset="0"/>
+                <a:ea typeface="Poppins" pitchFamily="34" charset="-122"/>
+                <a:cs typeface="Poppins" pitchFamily="34" charset="-120"/>
+              </a:rPr>
+              <a:t>Industry</a:t>
+            </a:r>
+            <a:endParaRPr lang="en-US" sz="600" dirty="0"/>
+          </a:p>
+        </p:txBody>
+      </p:sp>
+      <p:sp>
+        <p:nvSpPr>
+          <p:cNvPr id="34" name="Text 30"/>
+          <p:cNvSpPr/>
+          <p:nvPr/>
+        </p:nvSpPr>
+        <p:spPr>
+          <a:xfrm>
+            <a:off x="2404872" y="5253228"/>
+            <a:ext cx="1088136" cy="96012"/>
+          </a:xfrm>
+          <a:prstGeom prst="rect">
+            <a:avLst/>
+          </a:prstGeom>
+          <a:noFill/>
+          <a:ln/>
+        </p:spPr>
+        <p:txBody>
+          <a:bodyPr wrap="square" lIns="0" tIns="0" rIns="0" bIns="0" rtlCol="0" anchor="ctr"/>
+          <a:lstStyle/>
+          <a:p>
+            <a:pPr indent="0" marL="0">
+              <a:buNone/>
+            </a:pPr>
+            <a:r>
+              <a:rPr lang="en-US" sz="600" dirty="0">
+                <a:solidFill>
+                  <a:srgbClr val="222F44"/>
+                </a:solidFill>
+                <a:latin typeface="Poppins" pitchFamily="34" charset="0"/>
+                <a:ea typeface="Poppins" pitchFamily="34" charset="-122"/>
+                <a:cs typeface="Poppins" pitchFamily="34" charset="-120"/>
+              </a:rPr>
+              <a:t>Forest</a:t>
+            </a:r>
+            <a:endParaRPr lang="en-US" sz="600" dirty="0"/>
+          </a:p>
+        </p:txBody>
+      </p:sp>
+      <p:sp>
+        <p:nvSpPr>
+          <p:cNvPr id="35" name="Text 31"/>
+          <p:cNvSpPr/>
+          <p:nvPr/>
+        </p:nvSpPr>
+        <p:spPr>
+          <a:xfrm>
+            <a:off x="2404872" y="5349240"/>
+            <a:ext cx="1088136" cy="96012"/>
+          </a:xfrm>
+          <a:prstGeom prst="rect">
+            <a:avLst/>
+          </a:prstGeom>
+          <a:noFill/>
+          <a:ln/>
+        </p:spPr>
+        <p:txBody>
+          <a:bodyPr wrap="square" lIns="0" tIns="0" rIns="0" bIns="0" rtlCol="0" anchor="ctr"/>
+          <a:lstStyle/>
+          <a:p>
+            <a:pPr indent="0" marL="0">
+              <a:buNone/>
+            </a:pPr>
+            <a:r>
+              <a:rPr lang="en-US" sz="600" dirty="0">
+                <a:solidFill>
+                  <a:srgbClr val="222F44"/>
+                </a:solidFill>
+                <a:latin typeface="Poppins" pitchFamily="34" charset="0"/>
+                <a:ea typeface="Poppins" pitchFamily="34" charset="-122"/>
+                <a:cs typeface="Poppins" pitchFamily="34" charset="-120"/>
+              </a:rPr>
+              <a:t>Construction</a:t>
+            </a:r>
+            <a:endParaRPr lang="en-US" sz="600" dirty="0"/>
+          </a:p>
+        </p:txBody>
+      </p:sp>
+      <p:sp>
+        <p:nvSpPr>
+          <p:cNvPr id="36" name="Shape 32"/>
+          <p:cNvSpPr/>
+          <p:nvPr/>
+        </p:nvSpPr>
+        <p:spPr>
+          <a:xfrm>
+            <a:off x="5358384" y="4882896"/>
+            <a:ext cx="1133856" cy="141732"/>
+          </a:xfrm>
+          <a:prstGeom prst="rect">
+            <a:avLst/>
+          </a:prstGeom>
+          <a:solidFill>
+            <a:srgbClr val="D3A93D"/>
+          </a:solidFill>
+          <a:ln/>
+        </p:spPr>
+      </p:sp>
+      <p:sp>
+        <p:nvSpPr>
+          <p:cNvPr id="37" name="Text 33"/>
+          <p:cNvSpPr/>
+          <p:nvPr/>
+        </p:nvSpPr>
+        <p:spPr>
+          <a:xfrm>
+            <a:off x="5358384" y="4882896"/>
+            <a:ext cx="1133856" cy="141732"/>
+          </a:xfrm>
+          <a:prstGeom prst="rect">
+            <a:avLst/>
+          </a:prstGeom>
+          <a:noFill/>
+          <a:ln/>
+        </p:spPr>
+        <p:txBody>
+          <a:bodyPr wrap="square" lIns="0" tIns="0" rIns="0" bIns="0" rtlCol="0" anchor="ctr"/>
+          <a:lstStyle/>
+          <a:p>
+            <a:pPr algn="ctr" indent="0" marL="0">
+              <a:buNone/>
+            </a:pPr>
+            <a:r>
+              <a:rPr lang="en-US" sz="600" b="1" dirty="0">
+                <a:solidFill>
+                  <a:srgbClr val="222F44"/>
+                </a:solidFill>
+                <a:latin typeface="Poppins" pitchFamily="34" charset="0"/>
+                <a:ea typeface="Poppins" pitchFamily="34" charset="-122"/>
+                <a:cs typeface="Poppins" pitchFamily="34" charset="-120"/>
+              </a:rPr>
+              <a:t>Southeast</a:t>
+            </a:r>
+            <a:endParaRPr lang="en-US" sz="600" dirty="0"/>
+          </a:p>
+        </p:txBody>
+      </p:sp>
+      <p:sp>
+        <p:nvSpPr>
+          <p:cNvPr id="38" name="Text 34"/>
+          <p:cNvSpPr/>
+          <p:nvPr/>
+        </p:nvSpPr>
+        <p:spPr>
+          <a:xfrm>
+            <a:off x="5404104" y="5061204"/>
+            <a:ext cx="1088136" cy="96012"/>
+          </a:xfrm>
+          <a:prstGeom prst="rect">
+            <a:avLst/>
+          </a:prstGeom>
+          <a:noFill/>
+          <a:ln/>
+        </p:spPr>
+        <p:txBody>
+          <a:bodyPr wrap="square" lIns="0" tIns="0" rIns="0" bIns="0" rtlCol="0" anchor="ctr"/>
+          <a:lstStyle/>
+          <a:p>
+            <a:pPr indent="0" marL="0">
+              <a:buNone/>
+            </a:pPr>
+            <a:r>
+              <a:rPr lang="en-US" sz="600" dirty="0">
+                <a:solidFill>
+                  <a:srgbClr val="222F44"/>
+                </a:solidFill>
+                <a:latin typeface="Poppins" pitchFamily="34" charset="0"/>
+                <a:ea typeface="Poppins" pitchFamily="34" charset="-122"/>
+                <a:cs typeface="Poppins" pitchFamily="34" charset="-120"/>
+              </a:rPr>
+              <a:t>Forest and mining</a:t>
+            </a:r>
+            <a:endParaRPr lang="en-US" sz="600" dirty="0"/>
+          </a:p>
+        </p:txBody>
+      </p:sp>
+      <p:sp>
+        <p:nvSpPr>
+          <p:cNvPr id="39" name="Text 35"/>
+          <p:cNvSpPr/>
+          <p:nvPr/>
+        </p:nvSpPr>
+        <p:spPr>
+          <a:xfrm>
+            <a:off x="5404104" y="5157216"/>
+            <a:ext cx="1088136" cy="96012"/>
+          </a:xfrm>
+          <a:prstGeom prst="rect">
+            <a:avLst/>
+          </a:prstGeom>
+          <a:noFill/>
+          <a:ln/>
+        </p:spPr>
+        <p:txBody>
+          <a:bodyPr wrap="square" lIns="0" tIns="0" rIns="0" bIns="0" rtlCol="0" anchor="ctr"/>
+          <a:lstStyle/>
+          <a:p>
+            <a:pPr indent="0" marL="0">
+              <a:buNone/>
+            </a:pPr>
+            <a:r>
+              <a:rPr lang="en-US" sz="600" dirty="0">
+                <a:solidFill>
+                  <a:srgbClr val="222F44"/>
+                </a:solidFill>
+                <a:latin typeface="Poppins" pitchFamily="34" charset="0"/>
+                <a:ea typeface="Poppins" pitchFamily="34" charset="-122"/>
+                <a:cs typeface="Poppins" pitchFamily="34" charset="-120"/>
+              </a:rPr>
+              <a:t>Agriculture</a:t>
+            </a:r>
+            <a:endParaRPr lang="en-US" sz="600" dirty="0"/>
+          </a:p>
+        </p:txBody>
+      </p:sp>
+      <p:sp>
+        <p:nvSpPr>
+          <p:cNvPr id="40" name="Text 36"/>
+          <p:cNvSpPr/>
+          <p:nvPr/>
+        </p:nvSpPr>
+        <p:spPr>
+          <a:xfrm>
+            <a:off x="5404104" y="5253228"/>
+            <a:ext cx="1088136" cy="96012"/>
+          </a:xfrm>
+          <a:prstGeom prst="rect">
+            <a:avLst/>
+          </a:prstGeom>
+          <a:noFill/>
+          <a:ln/>
+        </p:spPr>
+        <p:txBody>
+          <a:bodyPr wrap="square" lIns="0" tIns="0" rIns="0" bIns="0" rtlCol="0" anchor="ctr"/>
+          <a:lstStyle/>
+          <a:p>
+            <a:pPr indent="0" marL="0">
+              <a:buNone/>
+            </a:pPr>
+            <a:r>
+              <a:rPr lang="en-US" sz="600" dirty="0">
+                <a:solidFill>
+                  <a:srgbClr val="222F44"/>
+                </a:solidFill>
+                <a:latin typeface="Poppins" pitchFamily="34" charset="0"/>
+                <a:ea typeface="Poppins" pitchFamily="34" charset="-122"/>
+                <a:cs typeface="Poppins" pitchFamily="34" charset="-120"/>
+              </a:rPr>
+              <a:t>Industry</a:t>
+            </a:r>
+            <a:endParaRPr lang="en-US" sz="600" dirty="0"/>
+          </a:p>
+        </p:txBody>
+      </p:sp>
+      <p:sp>
+        <p:nvSpPr>
+          <p:cNvPr id="41" name="Text 37"/>
+          <p:cNvSpPr/>
+          <p:nvPr/>
+        </p:nvSpPr>
+        <p:spPr>
+          <a:xfrm>
+            <a:off x="5404104" y="5349240"/>
+            <a:ext cx="1088136" cy="96012"/>
+          </a:xfrm>
+          <a:prstGeom prst="rect">
+            <a:avLst/>
+          </a:prstGeom>
+          <a:noFill/>
+          <a:ln/>
+        </p:spPr>
+        <p:txBody>
+          <a:bodyPr wrap="square" lIns="0" tIns="0" rIns="0" bIns="0" rtlCol="0" anchor="ctr"/>
+          <a:lstStyle/>
+          <a:p>
+            <a:pPr indent="0" marL="0">
+              <a:buNone/>
+            </a:pPr>
+            <a:r>
+              <a:rPr lang="en-US" sz="600" dirty="0">
+                <a:solidFill>
+                  <a:srgbClr val="222F44"/>
+                </a:solidFill>
+                <a:latin typeface="Poppins" pitchFamily="34" charset="0"/>
+                <a:ea typeface="Poppins" pitchFamily="34" charset="-122"/>
+                <a:cs typeface="Poppins" pitchFamily="34" charset="-120"/>
+              </a:rPr>
+              <a:t>Construction</a:t>
+            </a:r>
+            <a:endParaRPr lang="en-US" sz="600" dirty="0"/>
+          </a:p>
+        </p:txBody>
+      </p:sp>
+      <p:sp>
+        <p:nvSpPr>
+          <p:cNvPr id="42" name="Shape 38"/>
+          <p:cNvSpPr/>
+          <p:nvPr/>
+        </p:nvSpPr>
+        <p:spPr>
+          <a:xfrm>
+            <a:off x="3639312" y="5591556"/>
+            <a:ext cx="68580" cy="68580"/>
+          </a:xfrm>
+          <a:prstGeom prst="rect">
+            <a:avLst/>
+          </a:prstGeom>
+          <a:solidFill>
+            <a:srgbClr val="FFFFFF"/>
+          </a:solidFill>
+          <a:ln w="12700">
             <a:solidFill>
-              <a:srgbClr val="D3A93D"/>
+              <a:srgbClr val="222F44"/>
             </a:solidFill>
-            <a:prstDash val="dash"/>
+            <a:prstDash val="solid"/>
           </a:ln>
         </p:spPr>
       </p:sp>
       <p:sp>
         <p:nvSpPr>
-          <p:cNvPr id="19" name="Text 15"/>
-          <p:cNvSpPr/>
-          <p:nvPr/>
-        </p:nvSpPr>
-        <p:spPr>
-          <a:xfrm>
-            <a:off x="3341218" y="5173959"/>
-            <a:ext cx="914400" cy="331927"/>
+          <p:cNvPr id="43" name="Text 39"/>
+          <p:cNvSpPr/>
+          <p:nvPr/>
+        </p:nvSpPr>
+        <p:spPr>
+          <a:xfrm>
+            <a:off x="3749040" y="5580583"/>
+            <a:ext cx="1554480" cy="91440"/>
+          </a:xfrm>
+          <a:prstGeom prst="rect">
+            <a:avLst/>
+          </a:prstGeom>
+          <a:noFill/>
+          <a:ln/>
+        </p:spPr>
+        <p:txBody>
+          <a:bodyPr wrap="square" lIns="0" tIns="0" rIns="0" bIns="0" rtlCol="0" anchor="ctr"/>
+          <a:lstStyle/>
+          <a:p>
+            <a:pPr indent="0" marL="0">
+              <a:buNone/>
+            </a:pPr>
+            <a:r>
+              <a:rPr lang="en-US" sz="500" dirty="0">
+                <a:solidFill>
+                  <a:srgbClr val="222F44"/>
+                </a:solidFill>
+                <a:latin typeface="Poppins" pitchFamily="34" charset="0"/>
+                <a:ea typeface="Poppins" pitchFamily="34" charset="-122"/>
+                <a:cs typeface="Poppins" pitchFamily="34" charset="-120"/>
+              </a:rPr>
+              <a:t>States of the Company’s main operations</a:t>
+            </a:r>
+            <a:endParaRPr lang="en-US" sz="500" dirty="0"/>
+          </a:p>
+        </p:txBody>
+      </p:sp>
+      <p:sp>
+        <p:nvSpPr>
+          <p:cNvPr id="44" name="Shape 40"/>
+          <p:cNvSpPr/>
+          <p:nvPr/>
+        </p:nvSpPr>
+        <p:spPr>
+          <a:xfrm>
+            <a:off x="0" y="5698541"/>
+            <a:ext cx="6858000" cy="1523390"/>
+          </a:xfrm>
+          <a:prstGeom prst="rect">
+            <a:avLst/>
+          </a:prstGeom>
+          <a:solidFill>
+            <a:srgbClr val="F8F8F8"/>
+          </a:solidFill>
+          <a:ln/>
+        </p:spPr>
+      </p:sp>
+      <p:sp>
+        <p:nvSpPr>
+          <p:cNvPr id="45" name="Text 41"/>
+          <p:cNvSpPr/>
+          <p:nvPr/>
+        </p:nvSpPr>
+        <p:spPr>
+          <a:xfrm>
+            <a:off x="360274" y="5741518"/>
+            <a:ext cx="1933042" cy="198425"/>
           </a:xfrm>
           <a:prstGeom prst="rect">
             <a:avLst/>
@@ -1561,22 +2483,430 @@
           <a:bodyPr wrap="square" lIns="0" tIns="0" rIns="0" bIns="0" rtlCol="0" anchor="t"/>
           <a:lstStyle/>
           <a:p>
-            <a:pPr algn="ctr" indent="0" marL="0">
+            <a:pPr indent="0" marL="0">
+              <a:buNone/>
+            </a:pPr>
+            <a:r>
+              <a:rPr lang="en-US" sz="1200" b="1" dirty="0">
+                <a:solidFill>
+                  <a:srgbClr val="D3A93D"/>
+                </a:solidFill>
+                <a:latin typeface="Poppins" pitchFamily="34" charset="0"/>
+                <a:ea typeface="Poppins" pitchFamily="34" charset="-122"/>
+                <a:cs typeface="Poppins" pitchFamily="34" charset="-120"/>
+              </a:rPr>
+              <a:t>Key Highlights</a:t>
+            </a:r>
+            <a:endParaRPr lang="en-US" sz="1200" dirty="0"/>
+          </a:p>
+        </p:txBody>
+      </p:sp>
+      <p:sp>
+        <p:nvSpPr>
+          <p:cNvPr id="46" name="Text 42"/>
+          <p:cNvSpPr/>
+          <p:nvPr/>
+        </p:nvSpPr>
+        <p:spPr>
+          <a:xfrm>
+            <a:off x="410566" y="5933542"/>
+            <a:ext cx="1979676" cy="461772"/>
+          </a:xfrm>
+          <a:prstGeom prst="rect">
+            <a:avLst/>
+          </a:prstGeom>
+          <a:noFill/>
+          <a:ln/>
+        </p:spPr>
+        <p:txBody>
+          <a:bodyPr wrap="square" lIns="0" tIns="0" rIns="0" bIns="0" rtlCol="0" anchor="t"/>
+          <a:lstStyle/>
+          <a:p>
+            <a:pPr algn="l" indent="0" marL="0">
               <a:lnSpc>
                 <a:spcPct val="110000"/>
               </a:lnSpc>
               <a:buNone/>
             </a:pPr>
             <a:r>
-              <a:rPr lang="en-US" sz="1000" dirty="0">
-                <a:solidFill>
-                  <a:srgbClr val="222F44"/>
-                </a:solidFill>
-                <a:latin typeface="Poppins" pitchFamily="34" charset="0"/>
-                <a:ea typeface="Poppins" pitchFamily="34" charset="-122"/>
-                <a:cs typeface="Poppins" pitchFamily="34" charset="-120"/>
-              </a:rPr>
-              <a:t>Focus of operation</a:t>
+              <a:rPr lang="en-US" sz="2000" b="1" dirty="0">
+                <a:solidFill>
+                  <a:srgbClr val="222F44"/>
+                </a:solidFill>
+                <a:latin typeface="Poppins" pitchFamily="34" charset="0"/>
+                <a:ea typeface="Poppins" pitchFamily="34" charset="-122"/>
+                <a:cs typeface="Poppins" pitchFamily="34" charset="-120"/>
+              </a:rPr>
+              <a:t>BRL 2.6 Bn</a:t>
+            </a:r>
+            <a:endParaRPr lang="en-US" sz="2000" dirty="0"/>
+          </a:p>
+          <a:p>
+            <a:pPr algn="l" indent="0" marL="0">
+              <a:lnSpc>
+                <a:spcPct val="110000"/>
+              </a:lnSpc>
+              <a:buNone/>
+            </a:pPr>
+            <a:r>
+              <a:rPr lang="en-US" sz="1000" b="1" dirty="0">
+                <a:solidFill>
+                  <a:srgbClr val="222F44"/>
+                </a:solidFill>
+                <a:latin typeface="Poppins" pitchFamily="34" charset="0"/>
+                <a:ea typeface="Poppins" pitchFamily="34" charset="-122"/>
+                <a:cs typeface="Poppins" pitchFamily="34" charset="-120"/>
+              </a:rPr>
+              <a:t>Net revenues 2025⁽¹⁾</a:t>
+            </a:r>
+            <a:endParaRPr lang="en-US" sz="2000" dirty="0"/>
+          </a:p>
+        </p:txBody>
+      </p:sp>
+      <p:sp>
+        <p:nvSpPr>
+          <p:cNvPr id="47" name="Text 43"/>
+          <p:cNvSpPr/>
+          <p:nvPr/>
+        </p:nvSpPr>
+        <p:spPr>
+          <a:xfrm>
+            <a:off x="2518258" y="5933542"/>
+            <a:ext cx="1979676" cy="461772"/>
+          </a:xfrm>
+          <a:prstGeom prst="rect">
+            <a:avLst/>
+          </a:prstGeom>
+          <a:noFill/>
+          <a:ln/>
+        </p:spPr>
+        <p:txBody>
+          <a:bodyPr wrap="square" lIns="0" tIns="0" rIns="0" bIns="0" rtlCol="0" anchor="t"/>
+          <a:lstStyle/>
+          <a:p>
+            <a:pPr algn="l" indent="0" marL="0">
+              <a:lnSpc>
+                <a:spcPct val="110000"/>
+              </a:lnSpc>
+              <a:buNone/>
+            </a:pPr>
+            <a:r>
+              <a:rPr lang="en-US" sz="2000" b="1" dirty="0">
+                <a:solidFill>
+                  <a:srgbClr val="222F44"/>
+                </a:solidFill>
+                <a:latin typeface="Poppins" pitchFamily="34" charset="0"/>
+                <a:ea typeface="Poppins" pitchFamily="34" charset="-122"/>
+                <a:cs typeface="Poppins" pitchFamily="34" charset="-120"/>
+              </a:rPr>
+              <a:t>BRL 123 Mn</a:t>
+            </a:r>
+            <a:endParaRPr lang="en-US" sz="2000" dirty="0"/>
+          </a:p>
+          <a:p>
+            <a:pPr algn="l" indent="0" marL="0">
+              <a:lnSpc>
+                <a:spcPct val="110000"/>
+              </a:lnSpc>
+              <a:buNone/>
+            </a:pPr>
+            <a:r>
+              <a:rPr lang="en-US" sz="1000" b="1" dirty="0">
+                <a:solidFill>
+                  <a:srgbClr val="222F44"/>
+                </a:solidFill>
+                <a:latin typeface="Poppins" pitchFamily="34" charset="0"/>
+                <a:ea typeface="Poppins" pitchFamily="34" charset="-122"/>
+                <a:cs typeface="Poppins" pitchFamily="34" charset="-120"/>
+              </a:rPr>
+              <a:t>EBITDA 2025⁽¹⁾</a:t>
+            </a:r>
+            <a:endParaRPr lang="en-US" sz="2000" dirty="0"/>
+          </a:p>
+        </p:txBody>
+      </p:sp>
+      <p:sp>
+        <p:nvSpPr>
+          <p:cNvPr id="48" name="Text 44"/>
+          <p:cNvSpPr/>
+          <p:nvPr/>
+        </p:nvSpPr>
+        <p:spPr>
+          <a:xfrm>
+            <a:off x="4626864" y="5933542"/>
+            <a:ext cx="1979676" cy="461772"/>
+          </a:xfrm>
+          <a:prstGeom prst="rect">
+            <a:avLst/>
+          </a:prstGeom>
+          <a:noFill/>
+          <a:ln/>
+        </p:spPr>
+        <p:txBody>
+          <a:bodyPr wrap="square" lIns="0" tIns="0" rIns="0" bIns="0" rtlCol="0" anchor="t"/>
+          <a:lstStyle/>
+          <a:p>
+            <a:pPr algn="l" indent="0" marL="0">
+              <a:lnSpc>
+                <a:spcPct val="110000"/>
+              </a:lnSpc>
+              <a:buNone/>
+            </a:pPr>
+            <a:r>
+              <a:rPr lang="en-US" sz="2000" b="1" dirty="0">
+                <a:solidFill>
+                  <a:srgbClr val="222F44"/>
+                </a:solidFill>
+                <a:latin typeface="Poppins" pitchFamily="34" charset="0"/>
+                <a:ea typeface="Poppins" pitchFamily="34" charset="-122"/>
+                <a:cs typeface="Poppins" pitchFamily="34" charset="-120"/>
+              </a:rPr>
+              <a:t>#2</a:t>
+            </a:r>
+            <a:endParaRPr lang="en-US" sz="2000" dirty="0"/>
+          </a:p>
+          <a:p>
+            <a:pPr algn="l" indent="0" marL="0">
+              <a:lnSpc>
+                <a:spcPct val="110000"/>
+              </a:lnSpc>
+              <a:buNone/>
+            </a:pPr>
+            <a:r>
+              <a:rPr lang="en-US" sz="1000" b="1" dirty="0">
+                <a:solidFill>
+                  <a:srgbClr val="222F44"/>
+                </a:solidFill>
+                <a:latin typeface="Poppins" pitchFamily="34" charset="0"/>
+                <a:ea typeface="Poppins" pitchFamily="34" charset="-122"/>
+                <a:cs typeface="Poppins" pitchFamily="34" charset="-120"/>
+              </a:rPr>
+              <a:t>Dealer in heavy equipment</a:t>
+            </a:r>
+            <a:endParaRPr lang="en-US" sz="2000" dirty="0"/>
+          </a:p>
+        </p:txBody>
+      </p:sp>
+      <p:sp>
+        <p:nvSpPr>
+          <p:cNvPr id="49" name="Text 45"/>
+          <p:cNvSpPr/>
+          <p:nvPr/>
+        </p:nvSpPr>
+        <p:spPr>
+          <a:xfrm>
+            <a:off x="410566" y="6575450"/>
+            <a:ext cx="1979676" cy="461772"/>
+          </a:xfrm>
+          <a:prstGeom prst="rect">
+            <a:avLst/>
+          </a:prstGeom>
+          <a:noFill/>
+          <a:ln/>
+        </p:spPr>
+        <p:txBody>
+          <a:bodyPr wrap="square" lIns="0" tIns="0" rIns="0" bIns="0" rtlCol="0" anchor="t"/>
+          <a:lstStyle/>
+          <a:p>
+            <a:pPr algn="l" indent="0" marL="0">
+              <a:lnSpc>
+                <a:spcPct val="110000"/>
+              </a:lnSpc>
+              <a:buNone/>
+            </a:pPr>
+            <a:r>
+              <a:rPr lang="en-US" sz="2000" b="1" dirty="0">
+                <a:solidFill>
+                  <a:srgbClr val="222F44"/>
+                </a:solidFill>
+                <a:latin typeface="Poppins" pitchFamily="34" charset="0"/>
+                <a:ea typeface="Poppins" pitchFamily="34" charset="-122"/>
+                <a:cs typeface="Poppins" pitchFamily="34" charset="-120"/>
+              </a:rPr>
+              <a:t>36</a:t>
+            </a:r>
+            <a:endParaRPr lang="en-US" sz="2000" dirty="0"/>
+          </a:p>
+          <a:p>
+            <a:pPr algn="l" indent="0" marL="0">
+              <a:lnSpc>
+                <a:spcPct val="110000"/>
+              </a:lnSpc>
+              <a:buNone/>
+            </a:pPr>
+            <a:r>
+              <a:rPr lang="en-US" sz="1000" b="1" dirty="0">
+                <a:solidFill>
+                  <a:srgbClr val="222F44"/>
+                </a:solidFill>
+                <a:latin typeface="Poppins" pitchFamily="34" charset="0"/>
+                <a:ea typeface="Poppins" pitchFamily="34" charset="-122"/>
+                <a:cs typeface="Poppins" pitchFamily="34" charset="-120"/>
+              </a:rPr>
+              <a:t>Locations⁽²⁾</a:t>
+            </a:r>
+            <a:endParaRPr lang="en-US" sz="2000" dirty="0"/>
+          </a:p>
+        </p:txBody>
+      </p:sp>
+      <p:sp>
+        <p:nvSpPr>
+          <p:cNvPr id="50" name="Text 46"/>
+          <p:cNvSpPr/>
+          <p:nvPr/>
+        </p:nvSpPr>
+        <p:spPr>
+          <a:xfrm>
+            <a:off x="2518258" y="6575450"/>
+            <a:ext cx="1979676" cy="461772"/>
+          </a:xfrm>
+          <a:prstGeom prst="rect">
+            <a:avLst/>
+          </a:prstGeom>
+          <a:noFill/>
+          <a:ln/>
+        </p:spPr>
+        <p:txBody>
+          <a:bodyPr wrap="square" lIns="0" tIns="0" rIns="0" bIns="0" rtlCol="0" anchor="t"/>
+          <a:lstStyle/>
+          <a:p>
+            <a:pPr algn="l" indent="0" marL="0">
+              <a:lnSpc>
+                <a:spcPct val="110000"/>
+              </a:lnSpc>
+              <a:buNone/>
+            </a:pPr>
+            <a:r>
+              <a:rPr lang="en-US" sz="2000" b="1" dirty="0">
+                <a:solidFill>
+                  <a:srgbClr val="222F44"/>
+                </a:solidFill>
+                <a:latin typeface="Poppins" pitchFamily="34" charset="0"/>
+                <a:ea typeface="Poppins" pitchFamily="34" charset="-122"/>
+                <a:cs typeface="Poppins" pitchFamily="34" charset="-120"/>
+              </a:rPr>
+              <a:t>+1,000</a:t>
+            </a:r>
+            <a:endParaRPr lang="en-US" sz="2000" dirty="0"/>
+          </a:p>
+          <a:p>
+            <a:pPr algn="l" indent="0" marL="0">
+              <a:lnSpc>
+                <a:spcPct val="110000"/>
+              </a:lnSpc>
+              <a:buNone/>
+            </a:pPr>
+            <a:r>
+              <a:rPr lang="en-US" sz="1000" b="1" dirty="0">
+                <a:solidFill>
+                  <a:srgbClr val="222F44"/>
+                </a:solidFill>
+                <a:latin typeface="Poppins" pitchFamily="34" charset="0"/>
+                <a:ea typeface="Poppins" pitchFamily="34" charset="-122"/>
+                <a:cs typeface="Poppins" pitchFamily="34" charset="-120"/>
+              </a:rPr>
+              <a:t>Employees⁽²⁾</a:t>
+            </a:r>
+            <a:endParaRPr lang="en-US" sz="2000" dirty="0"/>
+          </a:p>
+        </p:txBody>
+      </p:sp>
+      <p:sp>
+        <p:nvSpPr>
+          <p:cNvPr id="51" name="Text 47"/>
+          <p:cNvSpPr/>
+          <p:nvPr/>
+        </p:nvSpPr>
+        <p:spPr>
+          <a:xfrm>
+            <a:off x="4626864" y="6575450"/>
+            <a:ext cx="1979676" cy="461772"/>
+          </a:xfrm>
+          <a:prstGeom prst="rect">
+            <a:avLst/>
+          </a:prstGeom>
+          <a:noFill/>
+          <a:ln/>
+        </p:spPr>
+        <p:txBody>
+          <a:bodyPr wrap="square" lIns="0" tIns="0" rIns="0" bIns="0" rtlCol="0" anchor="t"/>
+          <a:lstStyle/>
+          <a:p>
+            <a:pPr algn="l" indent="0" marL="0">
+              <a:lnSpc>
+                <a:spcPct val="110000"/>
+              </a:lnSpc>
+              <a:buNone/>
+            </a:pPr>
+            <a:r>
+              <a:rPr lang="en-US" sz="2000" b="1" dirty="0">
+                <a:solidFill>
+                  <a:srgbClr val="222F44"/>
+                </a:solidFill>
+                <a:latin typeface="Poppins" pitchFamily="34" charset="0"/>
+                <a:ea typeface="Poppins" pitchFamily="34" charset="-122"/>
+                <a:cs typeface="Poppins" pitchFamily="34" charset="-120"/>
+              </a:rPr>
+              <a:t>8</a:t>
+            </a:r>
+            <a:endParaRPr lang="en-US" sz="2000" dirty="0"/>
+          </a:p>
+          <a:p>
+            <a:pPr algn="l" indent="0" marL="0">
+              <a:lnSpc>
+                <a:spcPct val="110000"/>
+              </a:lnSpc>
+              <a:buNone/>
+            </a:pPr>
+            <a:r>
+              <a:rPr lang="en-US" sz="1000" b="1" dirty="0">
+                <a:solidFill>
+                  <a:srgbClr val="222F44"/>
+                </a:solidFill>
+                <a:latin typeface="Poppins" pitchFamily="34" charset="0"/>
+                <a:ea typeface="Poppins" pitchFamily="34" charset="-122"/>
+                <a:cs typeface="Poppins" pitchFamily="34" charset="-120"/>
+              </a:rPr>
+              <a:t>Sectors served</a:t>
+            </a:r>
+            <a:endParaRPr lang="en-US" sz="2000" dirty="0"/>
+          </a:p>
+        </p:txBody>
+      </p:sp>
+      <p:sp>
+        <p:nvSpPr>
+          <p:cNvPr id="52" name="Text 48"/>
+          <p:cNvSpPr/>
+          <p:nvPr/>
+        </p:nvSpPr>
+        <p:spPr>
+          <a:xfrm>
+            <a:off x="362102" y="7272223"/>
+            <a:ext cx="5767121" cy="162763"/>
+          </a:xfrm>
+          <a:prstGeom prst="rect">
+            <a:avLst/>
+          </a:prstGeom>
+          <a:noFill/>
+          <a:ln/>
+        </p:spPr>
+        <p:txBody>
+          <a:bodyPr wrap="square" lIns="0" tIns="0" rIns="0" bIns="0" rtlCol="0" anchor="t"/>
+          <a:lstStyle/>
+          <a:p>
+            <a:pPr indent="0" marL="0">
+              <a:buNone/>
+            </a:pPr>
+            <a:r>
+              <a:rPr lang="en-US" sz="1000" u="sng" dirty="0">
+                <a:solidFill>
+                  <a:srgbClr val="222F44"/>
+                </a:solidFill>
+                <a:latin typeface="Poppins" pitchFamily="34" charset="0"/>
+                <a:ea typeface="Poppins" pitchFamily="34" charset="-122"/>
+                <a:cs typeface="Poppins" pitchFamily="34" charset="-120"/>
+              </a:rPr>
+              <a:t>For any further questions please contact:</a:t>
             </a:r>
             <a:endParaRPr lang="en-US" sz="1000" dirty="0"/>
           </a:p>
@@ -1584,77 +2914,14 @@
       </p:sp>
       <p:sp>
         <p:nvSpPr>
-          <p:cNvPr id="20" name="Text 16"/>
-          <p:cNvSpPr/>
-          <p:nvPr/>
-        </p:nvSpPr>
-        <p:spPr>
-          <a:xfrm>
-            <a:off x="4575658" y="3840480"/>
-            <a:ext cx="2103120" cy="320040"/>
-          </a:xfrm>
-          <a:prstGeom prst="rect">
-            <a:avLst/>
-          </a:prstGeom>
-          <a:noFill/>
-          <a:ln/>
-        </p:spPr>
-        <p:txBody>
-          <a:bodyPr wrap="square" lIns="0" tIns="0" rIns="0" bIns="0" rtlCol="0" anchor="t"/>
-          <a:lstStyle/>
-          <a:p>
-            <a:pPr indent="0" marL="0">
-              <a:buNone/>
-            </a:pPr>
-            <a:r>
-              <a:rPr lang="en-US" sz="1300" b="1" dirty="0">
-                <a:solidFill>
-                  <a:srgbClr val="222F44"/>
-                </a:solidFill>
-                <a:latin typeface="Poppins" pitchFamily="34" charset="0"/>
-                <a:ea typeface="Poppins" pitchFamily="34" charset="-122"/>
-                <a:cs typeface="Poppins" pitchFamily="34" charset="-120"/>
-              </a:rPr>
-              <a:t>Technology platforms</a:t>
-            </a:r>
-            <a:endParaRPr lang="en-US" sz="1300" dirty="0"/>
-          </a:p>
-        </p:txBody>
-      </p:sp>
-      <p:pic>
-        <p:nvPicPr>
-          <p:cNvPr id="21" name="Image 2" descr="assets/icons/activity_navy.png">    </p:cNvPr>
-          <p:cNvPicPr>
-            <a:picLocks noChangeAspect="1"/>
-          </p:cNvPicPr>
-          <p:nvPr/>
-        </p:nvPicPr>
-        <p:blipFill>
-          <a:blip r:embed="rId3"/>
-          <a:stretch>
-            <a:fillRect/>
-          </a:stretch>
-        </p:blipFill>
-        <p:spPr>
-          <a:xfrm>
-            <a:off x="4575658" y="4297680"/>
-            <a:ext cx="169164" cy="169164"/>
-          </a:xfrm>
-          <a:prstGeom prst="rect">
-            <a:avLst/>
-          </a:prstGeom>
-        </p:spPr>
-      </p:pic>
-      <p:sp>
-        <p:nvSpPr>
-          <p:cNvPr id="22" name="Text 17"/>
-          <p:cNvSpPr/>
-          <p:nvPr/>
-        </p:nvSpPr>
-        <p:spPr>
-          <a:xfrm>
-            <a:off x="4808830" y="4229100"/>
-            <a:ext cx="1688897" cy="155448"/>
+          <p:cNvPr id="53" name="Text 49"/>
+          <p:cNvSpPr/>
+          <p:nvPr/>
+        </p:nvSpPr>
+        <p:spPr>
+          <a:xfrm>
+            <a:off x="360274" y="7488022"/>
+            <a:ext cx="1871777" cy="615391"/>
           </a:xfrm>
           <a:prstGeom prst="rect">
             <a:avLst/>
@@ -1673,40 +2940,18 @@
               <a:buNone/>
             </a:pPr>
             <a:r>
-              <a:rPr lang="en-US" sz="800" b="1" dirty="0">
-                <a:solidFill>
-                  <a:srgbClr val="222F44"/>
-                </a:solidFill>
-                <a:latin typeface="Poppins" pitchFamily="34" charset="0"/>
-                <a:ea typeface="Poppins" pitchFamily="34" charset="-122"/>
-                <a:cs typeface="Poppins" pitchFamily="34" charset="-120"/>
-              </a:rPr>
-              <a:t>Connected fleet support</a:t>
-            </a:r>
-            <a:endParaRPr lang="en-US" sz="800" dirty="0"/>
-          </a:p>
-        </p:txBody>
-      </p:sp>
-      <p:sp>
-        <p:nvSpPr>
-          <p:cNvPr id="23" name="Text 18"/>
-          <p:cNvSpPr/>
-          <p:nvPr/>
-        </p:nvSpPr>
-        <p:spPr>
-          <a:xfrm>
-            <a:off x="4808830" y="4384548"/>
-            <a:ext cx="1688897" cy="146304"/>
-          </a:xfrm>
-          <a:prstGeom prst="rect">
-            <a:avLst/>
-          </a:prstGeom>
-          <a:noFill/>
-          <a:ln/>
-        </p:spPr>
-        <p:txBody>
-          <a:bodyPr wrap="square" lIns="0" tIns="0" rIns="0" bIns="0" rtlCol="0" anchor="t"/>
-          <a:lstStyle/>
+              <a:rPr lang="en-US" sz="1000" b="1" dirty="0">
+                <a:solidFill>
+                  <a:srgbClr val="222F44"/>
+                </a:solidFill>
+                <a:latin typeface="Poppins" pitchFamily="34" charset="0"/>
+                <a:ea typeface="Poppins" pitchFamily="34" charset="-122"/>
+                <a:cs typeface="Poppins" pitchFamily="34" charset="-120"/>
+              </a:rPr>
+              <a:t>Bruno Iervolino</a:t>
+            </a:r>
+            <a:endParaRPr lang="en-US" sz="1000" dirty="0"/>
+          </a:p>
           <a:p>
             <a:pPr indent="0" marL="0">
               <a:lnSpc>
@@ -1715,84 +2960,18 @@
               <a:buNone/>
             </a:pPr>
             <a:r>
-              <a:rPr lang="en-US" sz="700" dirty="0">
-                <a:solidFill>
-                  <a:srgbClr val="222F44"/>
-                </a:solidFill>
-                <a:latin typeface="Poppins" pitchFamily="34" charset="0"/>
-                <a:ea typeface="Poppins" pitchFamily="34" charset="-122"/>
-                <a:cs typeface="Poppins" pitchFamily="34" charset="-120"/>
-              </a:rPr>
-              <a:t>4.1k machines · 2 control centres</a:t>
-            </a:r>
-            <a:endParaRPr lang="en-US" sz="700" dirty="0"/>
-          </a:p>
-        </p:txBody>
-      </p:sp>
-      <p:sp>
-        <p:nvSpPr>
-          <p:cNvPr id="24" name="Shape 19"/>
-          <p:cNvSpPr/>
-          <p:nvPr/>
-        </p:nvSpPr>
-        <p:spPr>
-          <a:xfrm>
-            <a:off x="4575658" y="4556455"/>
-            <a:ext cx="1922069" cy="5486"/>
-          </a:xfrm>
-          <a:prstGeom prst="rect">
-            <a:avLst/>
-          </a:prstGeom>
-          <a:solidFill>
-            <a:srgbClr val="E4E7EC"/>
-          </a:solidFill>
-          <a:ln/>
-        </p:spPr>
-      </p:sp>
-      <p:pic>
-        <p:nvPicPr>
-          <p:cNvPr id="25" name="Image 3" descr="assets/icons/target_navy.png">    </p:cNvPr>
-          <p:cNvPicPr>
-            <a:picLocks noChangeAspect="1"/>
-          </p:cNvPicPr>
-          <p:nvPr/>
-        </p:nvPicPr>
-        <p:blipFill>
-          <a:blip r:embed="rId4"/>
-          <a:stretch>
-            <a:fillRect/>
-          </a:stretch>
-        </p:blipFill>
-        <p:spPr>
-          <a:xfrm>
-            <a:off x="4575658" y="4658868"/>
-            <a:ext cx="169164" cy="169164"/>
-          </a:xfrm>
-          <a:prstGeom prst="rect">
-            <a:avLst/>
-          </a:prstGeom>
-        </p:spPr>
-      </p:pic>
-      <p:sp>
-        <p:nvSpPr>
-          <p:cNvPr id="26" name="Text 20"/>
-          <p:cNvSpPr/>
-          <p:nvPr/>
-        </p:nvSpPr>
-        <p:spPr>
-          <a:xfrm>
-            <a:off x="4808830" y="4590288"/>
-            <a:ext cx="1688897" cy="155448"/>
-          </a:xfrm>
-          <a:prstGeom prst="rect">
-            <a:avLst/>
-          </a:prstGeom>
-          <a:noFill/>
-          <a:ln/>
-        </p:spPr>
-        <p:txBody>
-          <a:bodyPr wrap="square" lIns="0" tIns="0" rIns="0" bIns="0" rtlCol="0" anchor="t"/>
-          <a:lstStyle/>
+              <a:rPr lang="en-US" sz="1000" dirty="0">
+                <a:solidFill>
+                  <a:srgbClr val="222F44"/>
+                </a:solidFill>
+                <a:latin typeface="Poppins" pitchFamily="34" charset="0"/>
+                <a:ea typeface="Poppins" pitchFamily="34" charset="-122"/>
+                <a:cs typeface="Poppins" pitchFamily="34" charset="-120"/>
+              </a:rPr>
+              <a:t>Bruno.iervolino@igcp.com.br</a:t>
+            </a:r>
+            <a:endParaRPr lang="en-US" sz="1000" dirty="0"/>
+          </a:p>
           <a:p>
             <a:pPr indent="0" marL="0">
               <a:lnSpc>
@@ -1801,30 +2980,30 @@
               <a:buNone/>
             </a:pPr>
             <a:r>
-              <a:rPr lang="en-US" sz="800" b="1" dirty="0">
-                <a:solidFill>
-                  <a:srgbClr val="222F44"/>
-                </a:solidFill>
-                <a:latin typeface="Poppins" pitchFamily="34" charset="0"/>
-                <a:ea typeface="Poppins" pitchFamily="34" charset="-122"/>
-                <a:cs typeface="Poppins" pitchFamily="34" charset="-120"/>
-              </a:rPr>
-              <a:t>Harvest monitoring</a:t>
-            </a:r>
-            <a:endParaRPr lang="en-US" sz="800" dirty="0"/>
-          </a:p>
-        </p:txBody>
-      </p:sp>
-      <p:sp>
-        <p:nvSpPr>
-          <p:cNvPr id="27" name="Text 21"/>
-          <p:cNvSpPr/>
-          <p:nvPr/>
-        </p:nvSpPr>
-        <p:spPr>
-          <a:xfrm>
-            <a:off x="4808830" y="4745736"/>
-            <a:ext cx="1688897" cy="146304"/>
+              <a:rPr lang="en-US" sz="1000" dirty="0">
+                <a:solidFill>
+                  <a:srgbClr val="222F44"/>
+                </a:solidFill>
+                <a:latin typeface="Poppins" pitchFamily="34" charset="0"/>
+                <a:ea typeface="Poppins" pitchFamily="34" charset="-122"/>
+                <a:cs typeface="Poppins" pitchFamily="34" charset="-120"/>
+              </a:rPr>
+              <a:t>+55 11 3815 3533</a:t>
+            </a:r>
+            <a:endParaRPr lang="en-US" sz="1000" dirty="0"/>
+          </a:p>
+        </p:txBody>
+      </p:sp>
+      <p:sp>
+        <p:nvSpPr>
+          <p:cNvPr id="54" name="Text 50"/>
+          <p:cNvSpPr/>
+          <p:nvPr/>
+        </p:nvSpPr>
+        <p:spPr>
+          <a:xfrm>
+            <a:off x="2399386" y="7488022"/>
+            <a:ext cx="1871777" cy="615391"/>
           </a:xfrm>
           <a:prstGeom prst="rect">
             <a:avLst/>
@@ -1843,84 +3022,18 @@
               <a:buNone/>
             </a:pPr>
             <a:r>
-              <a:rPr lang="en-US" sz="700" dirty="0">
-                <a:solidFill>
-                  <a:srgbClr val="222F44"/>
-                </a:solidFill>
-                <a:latin typeface="Poppins" pitchFamily="34" charset="0"/>
-                <a:ea typeface="Poppins" pitchFamily="34" charset="-122"/>
-                <a:cs typeface="Poppins" pitchFamily="34" charset="-120"/>
-              </a:rPr>
-              <a:t>Full field monitoring of harvesters</a:t>
-            </a:r>
-            <a:endParaRPr lang="en-US" sz="700" dirty="0"/>
-          </a:p>
-        </p:txBody>
-      </p:sp>
-      <p:sp>
-        <p:nvSpPr>
-          <p:cNvPr id="28" name="Shape 22"/>
-          <p:cNvSpPr/>
-          <p:nvPr/>
-        </p:nvSpPr>
-        <p:spPr>
-          <a:xfrm>
-            <a:off x="4575658" y="4917643"/>
-            <a:ext cx="1922069" cy="5486"/>
-          </a:xfrm>
-          <a:prstGeom prst="rect">
-            <a:avLst/>
-          </a:prstGeom>
-          <a:solidFill>
-            <a:srgbClr val="E4E7EC"/>
-          </a:solidFill>
-          <a:ln/>
-        </p:spPr>
-      </p:sp>
-      <p:pic>
-        <p:nvPicPr>
-          <p:cNvPr id="29" name="Image 4" descr="assets/icons/layers_navy.png">    </p:cNvPr>
-          <p:cNvPicPr>
-            <a:picLocks noChangeAspect="1"/>
-          </p:cNvPicPr>
-          <p:nvPr/>
-        </p:nvPicPr>
-        <p:blipFill>
-          <a:blip r:embed="rId5"/>
-          <a:stretch>
-            <a:fillRect/>
-          </a:stretch>
-        </p:blipFill>
-        <p:spPr>
-          <a:xfrm>
-            <a:off x="4575658" y="5020056"/>
-            <a:ext cx="169164" cy="169164"/>
-          </a:xfrm>
-          <a:prstGeom prst="rect">
-            <a:avLst/>
-          </a:prstGeom>
-        </p:spPr>
-      </p:pic>
-      <p:sp>
-        <p:nvSpPr>
-          <p:cNvPr id="30" name="Text 23"/>
-          <p:cNvSpPr/>
-          <p:nvPr/>
-        </p:nvSpPr>
-        <p:spPr>
-          <a:xfrm>
-            <a:off x="4808830" y="4951476"/>
-            <a:ext cx="1688897" cy="155448"/>
-          </a:xfrm>
-          <a:prstGeom prst="rect">
-            <a:avLst/>
-          </a:prstGeom>
-          <a:noFill/>
-          <a:ln/>
-        </p:spPr>
-        <p:txBody>
-          <a:bodyPr wrap="square" lIns="0" tIns="0" rIns="0" bIns="0" rtlCol="0" anchor="t"/>
-          <a:lstStyle/>
+              <a:rPr lang="en-US" sz="1000" b="1" dirty="0">
+                <a:solidFill>
+                  <a:srgbClr val="222F44"/>
+                </a:solidFill>
+                <a:latin typeface="Poppins" pitchFamily="34" charset="0"/>
+                <a:ea typeface="Poppins" pitchFamily="34" charset="-122"/>
+                <a:cs typeface="Poppins" pitchFamily="34" charset="-120"/>
+              </a:rPr>
+              <a:t>Gabriel Brito</a:t>
+            </a:r>
+            <a:endParaRPr lang="en-US" sz="1000" dirty="0"/>
+          </a:p>
           <a:p>
             <a:pPr indent="0" marL="0">
               <a:lnSpc>
@@ -1929,40 +3042,18 @@
               <a:buNone/>
             </a:pPr>
             <a:r>
-              <a:rPr lang="en-US" sz="800" b="1" dirty="0">
-                <a:solidFill>
-                  <a:srgbClr val="222F44"/>
-                </a:solidFill>
-                <a:latin typeface="Poppins" pitchFamily="34" charset="0"/>
-                <a:ea typeface="Poppins" pitchFamily="34" charset="-122"/>
-                <a:cs typeface="Poppins" pitchFamily="34" charset="-120"/>
-              </a:rPr>
-              <a:t>Agronomic intelligence</a:t>
-            </a:r>
-            <a:endParaRPr lang="en-US" sz="800" dirty="0"/>
-          </a:p>
-        </p:txBody>
-      </p:sp>
-      <p:sp>
-        <p:nvSpPr>
-          <p:cNvPr id="31" name="Text 24"/>
-          <p:cNvSpPr/>
-          <p:nvPr/>
-        </p:nvSpPr>
-        <p:spPr>
-          <a:xfrm>
-            <a:off x="4808830" y="5106924"/>
-            <a:ext cx="1688897" cy="146304"/>
-          </a:xfrm>
-          <a:prstGeom prst="rect">
-            <a:avLst/>
-          </a:prstGeom>
-          <a:noFill/>
-          <a:ln/>
-        </p:spPr>
-        <p:txBody>
-          <a:bodyPr wrap="square" lIns="0" tIns="0" rIns="0" bIns="0" rtlCol="0" anchor="t"/>
-          <a:lstStyle/>
+              <a:rPr lang="en-US" sz="1000" dirty="0">
+                <a:solidFill>
+                  <a:srgbClr val="222F44"/>
+                </a:solidFill>
+                <a:latin typeface="Poppins" pitchFamily="34" charset="0"/>
+                <a:ea typeface="Poppins" pitchFamily="34" charset="-122"/>
+                <a:cs typeface="Poppins" pitchFamily="34" charset="-120"/>
+              </a:rPr>
+              <a:t>Gabriel.brito@igcp.com.br</a:t>
+            </a:r>
+            <a:endParaRPr lang="en-US" sz="1000" dirty="0"/>
+          </a:p>
           <a:p>
             <a:pPr indent="0" marL="0">
               <a:lnSpc>
@@ -1971,74 +3062,30 @@
               <a:buNone/>
             </a:pPr>
             <a:r>
-              <a:rPr lang="en-US" sz="700" dirty="0">
-                <a:solidFill>
-                  <a:srgbClr val="222F44"/>
-                </a:solidFill>
-                <a:latin typeface="Poppins" pitchFamily="34" charset="0"/>
-                <a:ea typeface="Poppins" pitchFamily="34" charset="-122"/>
-                <a:cs typeface="Poppins" pitchFamily="34" charset="-120"/>
-              </a:rPr>
-              <a:t>Satellite, climate and soil data</a:t>
-            </a:r>
-            <a:endParaRPr lang="en-US" sz="700" dirty="0"/>
-          </a:p>
-        </p:txBody>
-      </p:sp>
-      <p:sp>
-        <p:nvSpPr>
-          <p:cNvPr id="32" name="Shape 25"/>
-          <p:cNvSpPr/>
-          <p:nvPr/>
-        </p:nvSpPr>
-        <p:spPr>
-          <a:xfrm>
-            <a:off x="4575658" y="5278831"/>
-            <a:ext cx="1922069" cy="5486"/>
-          </a:xfrm>
-          <a:prstGeom prst="rect">
-            <a:avLst/>
-          </a:prstGeom>
-          <a:solidFill>
-            <a:srgbClr val="E4E7EC"/>
-          </a:solidFill>
-          <a:ln/>
-        </p:spPr>
-      </p:sp>
-      <p:pic>
-        <p:nvPicPr>
-          <p:cNvPr id="33" name="Image 5" descr="assets/icons/clock_navy.png">    </p:cNvPr>
-          <p:cNvPicPr>
-            <a:picLocks noChangeAspect="1"/>
-          </p:cNvPicPr>
-          <p:nvPr/>
-        </p:nvPicPr>
-        <p:blipFill>
-          <a:blip r:embed="rId6"/>
-          <a:stretch>
-            <a:fillRect/>
-          </a:stretch>
-        </p:blipFill>
-        <p:spPr>
-          <a:xfrm>
-            <a:off x="4575658" y="5381244"/>
-            <a:ext cx="169164" cy="169164"/>
-          </a:xfrm>
-          <a:prstGeom prst="rect">
-            <a:avLst/>
-          </a:prstGeom>
-        </p:spPr>
-      </p:pic>
-      <p:sp>
-        <p:nvSpPr>
-          <p:cNvPr id="34" name="Text 26"/>
-          <p:cNvSpPr/>
-          <p:nvPr/>
-        </p:nvSpPr>
-        <p:spPr>
-          <a:xfrm>
-            <a:off x="4808830" y="5312664"/>
-            <a:ext cx="1688897" cy="155448"/>
+              <a:rPr lang="en-US" sz="1000" dirty="0">
+                <a:solidFill>
+                  <a:srgbClr val="222F44"/>
+                </a:solidFill>
+                <a:latin typeface="Poppins" pitchFamily="34" charset="0"/>
+                <a:ea typeface="Poppins" pitchFamily="34" charset="-122"/>
+                <a:cs typeface="Poppins" pitchFamily="34" charset="-120"/>
+              </a:rPr>
+              <a:t>+55 11 3815 3533</a:t>
+            </a:r>
+            <a:endParaRPr lang="en-US" sz="1000" dirty="0"/>
+          </a:p>
+        </p:txBody>
+      </p:sp>
+      <p:sp>
+        <p:nvSpPr>
+          <p:cNvPr id="55" name="Text 51"/>
+          <p:cNvSpPr/>
+          <p:nvPr/>
+        </p:nvSpPr>
+        <p:spPr>
+          <a:xfrm>
+            <a:off x="4438498" y="7488022"/>
+            <a:ext cx="1871777" cy="615391"/>
           </a:xfrm>
           <a:prstGeom prst="rect">
             <a:avLst/>
@@ -2057,40 +3104,18 @@
               <a:buNone/>
             </a:pPr>
             <a:r>
-              <a:rPr lang="en-US" sz="800" b="1" dirty="0">
-                <a:solidFill>
-                  <a:srgbClr val="222F44"/>
-                </a:solidFill>
-                <a:latin typeface="Poppins" pitchFamily="34" charset="0"/>
-                <a:ea typeface="Poppins" pitchFamily="34" charset="-122"/>
-                <a:cs typeface="Poppins" pitchFamily="34" charset="-120"/>
-              </a:rPr>
-              <a:t>Autonomous parts store</a:t>
-            </a:r>
-            <a:endParaRPr lang="en-US" sz="800" dirty="0"/>
-          </a:p>
-        </p:txBody>
-      </p:sp>
-      <p:sp>
-        <p:nvSpPr>
-          <p:cNvPr id="35" name="Text 27"/>
-          <p:cNvSpPr/>
-          <p:nvPr/>
-        </p:nvSpPr>
-        <p:spPr>
-          <a:xfrm>
-            <a:off x="4808830" y="5468112"/>
-            <a:ext cx="1688897" cy="146304"/>
-          </a:xfrm>
-          <a:prstGeom prst="rect">
-            <a:avLst/>
-          </a:prstGeom>
-          <a:noFill/>
-          <a:ln/>
-        </p:spPr>
-        <p:txBody>
-          <a:bodyPr wrap="square" lIns="0" tIns="0" rIns="0" bIns="0" rtlCol="0" anchor="t"/>
-          <a:lstStyle/>
+              <a:rPr lang="en-US" sz="1000" b="1" dirty="0">
+                <a:solidFill>
+                  <a:srgbClr val="222F44"/>
+                </a:solidFill>
+                <a:latin typeface="Poppins" pitchFamily="34" charset="0"/>
+                <a:ea typeface="Poppins" pitchFamily="34" charset="-122"/>
+                <a:cs typeface="Poppins" pitchFamily="34" charset="-120"/>
+              </a:rPr>
+              <a:t>Pedro Grando</a:t>
+            </a:r>
+            <a:endParaRPr lang="en-US" sz="1000" dirty="0"/>
+          </a:p>
           <a:p>
             <a:pPr indent="0" marL="0">
               <a:lnSpc>
@@ -2099,510 +3124,18 @@
               <a:buNone/>
             </a:pPr>
             <a:r>
-              <a:rPr lang="en-US" sz="700" dirty="0">
-                <a:solidFill>
-                  <a:srgbClr val="222F44"/>
-                </a:solidFill>
-                <a:latin typeface="Poppins" pitchFamily="34" charset="0"/>
-                <a:ea typeface="Poppins" pitchFamily="34" charset="-122"/>
-                <a:cs typeface="Poppins" pitchFamily="34" charset="-120"/>
-              </a:rPr>
-              <a:t>24/7 self-service parts and tools</a:t>
-            </a:r>
-            <a:endParaRPr lang="en-US" sz="700" dirty="0"/>
-          </a:p>
-        </p:txBody>
-      </p:sp>
-      <p:sp>
-        <p:nvSpPr>
-          <p:cNvPr id="36" name="Shape 28"/>
-          <p:cNvSpPr/>
-          <p:nvPr/>
-        </p:nvSpPr>
-        <p:spPr>
-          <a:xfrm>
-            <a:off x="0" y="5698541"/>
-            <a:ext cx="6858000" cy="1523390"/>
-          </a:xfrm>
-          <a:prstGeom prst="rect">
-            <a:avLst/>
-          </a:prstGeom>
-          <a:solidFill>
-            <a:srgbClr val="F8F8F8"/>
-          </a:solidFill>
-          <a:ln/>
-        </p:spPr>
-      </p:sp>
-      <p:sp>
-        <p:nvSpPr>
-          <p:cNvPr id="37" name="Text 29"/>
-          <p:cNvSpPr/>
-          <p:nvPr/>
-        </p:nvSpPr>
-        <p:spPr>
-          <a:xfrm>
-            <a:off x="360274" y="5741518"/>
-            <a:ext cx="1933042" cy="198425"/>
-          </a:xfrm>
-          <a:prstGeom prst="rect">
-            <a:avLst/>
-          </a:prstGeom>
-          <a:noFill/>
-          <a:ln/>
-        </p:spPr>
-        <p:txBody>
-          <a:bodyPr wrap="square" lIns="0" tIns="0" rIns="0" bIns="0" rtlCol="0" anchor="t"/>
-          <a:lstStyle/>
-          <a:p>
-            <a:pPr indent="0" marL="0">
-              <a:buNone/>
-            </a:pPr>
-            <a:r>
-              <a:rPr lang="en-US" sz="1200" b="1" dirty="0">
-                <a:solidFill>
-                  <a:srgbClr val="D3A93D"/>
-                </a:solidFill>
-                <a:latin typeface="Poppins" pitchFamily="34" charset="0"/>
-                <a:ea typeface="Poppins" pitchFamily="34" charset="-122"/>
-                <a:cs typeface="Poppins" pitchFamily="34" charset="-120"/>
-              </a:rPr>
-              <a:t>Key Highlights</a:t>
-            </a:r>
-            <a:endParaRPr lang="en-US" sz="1200" dirty="0"/>
-          </a:p>
-        </p:txBody>
-      </p:sp>
-      <p:sp>
-        <p:nvSpPr>
-          <p:cNvPr id="38" name="Text 30"/>
-          <p:cNvSpPr/>
-          <p:nvPr/>
-        </p:nvSpPr>
-        <p:spPr>
-          <a:xfrm>
-            <a:off x="410566" y="5933542"/>
-            <a:ext cx="1979676" cy="461772"/>
-          </a:xfrm>
-          <a:prstGeom prst="rect">
-            <a:avLst/>
-          </a:prstGeom>
-          <a:noFill/>
-          <a:ln/>
-        </p:spPr>
-        <p:txBody>
-          <a:bodyPr wrap="square" lIns="0" tIns="0" rIns="0" bIns="0" rtlCol="0" anchor="t"/>
-          <a:lstStyle/>
-          <a:p>
-            <a:pPr algn="l" indent="0" marL="0">
-              <a:lnSpc>
-                <a:spcPct val="110000"/>
-              </a:lnSpc>
-              <a:buNone/>
-            </a:pPr>
-            <a:r>
-              <a:rPr lang="en-US" sz="2000" b="1" dirty="0">
-                <a:solidFill>
-                  <a:srgbClr val="222F44"/>
-                </a:solidFill>
-                <a:latin typeface="Poppins" pitchFamily="34" charset="0"/>
-                <a:ea typeface="Poppins" pitchFamily="34" charset="-122"/>
-                <a:cs typeface="Poppins" pitchFamily="34" charset="-120"/>
-              </a:rPr>
-              <a:t>BRL 1.4 Bn</a:t>
-            </a:r>
-            <a:endParaRPr lang="en-US" sz="2000" dirty="0"/>
-          </a:p>
-          <a:p>
-            <a:pPr algn="l" indent="0" marL="0">
-              <a:lnSpc>
-                <a:spcPct val="110000"/>
-              </a:lnSpc>
-              <a:buNone/>
-            </a:pPr>
-            <a:r>
-              <a:rPr lang="en-US" sz="1000" b="1" dirty="0">
-                <a:solidFill>
-                  <a:srgbClr val="222F44"/>
-                </a:solidFill>
-                <a:latin typeface="Poppins" pitchFamily="34" charset="0"/>
-                <a:ea typeface="Poppins" pitchFamily="34" charset="-122"/>
-                <a:cs typeface="Poppins" pitchFamily="34" charset="-120"/>
-              </a:rPr>
-              <a:t>Net revenues 2025⁽¹⁾</a:t>
-            </a:r>
-            <a:endParaRPr lang="en-US" sz="2000" dirty="0"/>
-          </a:p>
-        </p:txBody>
-      </p:sp>
-      <p:sp>
-        <p:nvSpPr>
-          <p:cNvPr id="39" name="Text 31"/>
-          <p:cNvSpPr/>
-          <p:nvPr/>
-        </p:nvSpPr>
-        <p:spPr>
-          <a:xfrm>
-            <a:off x="2518258" y="5933542"/>
-            <a:ext cx="1979676" cy="461772"/>
-          </a:xfrm>
-          <a:prstGeom prst="rect">
-            <a:avLst/>
-          </a:prstGeom>
-          <a:noFill/>
-          <a:ln/>
-        </p:spPr>
-        <p:txBody>
-          <a:bodyPr wrap="square" lIns="0" tIns="0" rIns="0" bIns="0" rtlCol="0" anchor="t"/>
-          <a:lstStyle/>
-          <a:p>
-            <a:pPr algn="l" indent="0" marL="0">
-              <a:lnSpc>
-                <a:spcPct val="110000"/>
-              </a:lnSpc>
-              <a:buNone/>
-            </a:pPr>
-            <a:r>
-              <a:rPr lang="en-US" sz="2000" b="1" dirty="0">
-                <a:solidFill>
-                  <a:srgbClr val="222F44"/>
-                </a:solidFill>
-                <a:latin typeface="Poppins" pitchFamily="34" charset="0"/>
-                <a:ea typeface="Poppins" pitchFamily="34" charset="-122"/>
-                <a:cs typeface="Poppins" pitchFamily="34" charset="-120"/>
-              </a:rPr>
-              <a:t>BRL 58 Mn</a:t>
-            </a:r>
-            <a:endParaRPr lang="en-US" sz="2000" dirty="0"/>
-          </a:p>
-          <a:p>
-            <a:pPr algn="l" indent="0" marL="0">
-              <a:lnSpc>
-                <a:spcPct val="110000"/>
-              </a:lnSpc>
-              <a:buNone/>
-            </a:pPr>
-            <a:r>
-              <a:rPr lang="en-US" sz="1000" b="1" dirty="0">
-                <a:solidFill>
-                  <a:srgbClr val="222F44"/>
-                </a:solidFill>
-                <a:latin typeface="Poppins" pitchFamily="34" charset="0"/>
-                <a:ea typeface="Poppins" pitchFamily="34" charset="-122"/>
-                <a:cs typeface="Poppins" pitchFamily="34" charset="-120"/>
-              </a:rPr>
-              <a:t>EBITDA 2025⁽¹⁾</a:t>
-            </a:r>
-            <a:endParaRPr lang="en-US" sz="2000" dirty="0"/>
-          </a:p>
-        </p:txBody>
-      </p:sp>
-      <p:sp>
-        <p:nvSpPr>
-          <p:cNvPr id="40" name="Text 32"/>
-          <p:cNvSpPr/>
-          <p:nvPr/>
-        </p:nvSpPr>
-        <p:spPr>
-          <a:xfrm>
-            <a:off x="4626864" y="5933542"/>
-            <a:ext cx="1979676" cy="461772"/>
-          </a:xfrm>
-          <a:prstGeom prst="rect">
-            <a:avLst/>
-          </a:prstGeom>
-          <a:noFill/>
-          <a:ln/>
-        </p:spPr>
-        <p:txBody>
-          <a:bodyPr wrap="square" lIns="0" tIns="0" rIns="0" bIns="0" rtlCol="0" anchor="t"/>
-          <a:lstStyle/>
-          <a:p>
-            <a:pPr algn="l" indent="0" marL="0">
-              <a:lnSpc>
-                <a:spcPct val="110000"/>
-              </a:lnSpc>
-              <a:buNone/>
-            </a:pPr>
-            <a:r>
-              <a:rPr lang="en-US" sz="2000" b="1" dirty="0">
-                <a:solidFill>
-                  <a:srgbClr val="222F44"/>
-                </a:solidFill>
-                <a:latin typeface="Poppins" pitchFamily="34" charset="0"/>
-                <a:ea typeface="Poppins" pitchFamily="34" charset="-122"/>
-                <a:cs typeface="Poppins" pitchFamily="34" charset="-120"/>
-              </a:rPr>
-              <a:t>1,513</a:t>
-            </a:r>
-            <a:endParaRPr lang="en-US" sz="2000" dirty="0"/>
-          </a:p>
-          <a:p>
-            <a:pPr algn="l" indent="0" marL="0">
-              <a:lnSpc>
-                <a:spcPct val="110000"/>
-              </a:lnSpc>
-              <a:buNone/>
-            </a:pPr>
-            <a:r>
-              <a:rPr lang="en-US" sz="1000" b="1" dirty="0">
-                <a:solidFill>
-                  <a:srgbClr val="222F44"/>
-                </a:solidFill>
-                <a:latin typeface="Poppins" pitchFamily="34" charset="0"/>
-                <a:ea typeface="Poppins" pitchFamily="34" charset="-122"/>
-                <a:cs typeface="Poppins" pitchFamily="34" charset="-120"/>
-              </a:rPr>
-              <a:t>Machines sold in 2025</a:t>
-            </a:r>
-            <a:endParaRPr lang="en-US" sz="2000" dirty="0"/>
-          </a:p>
-        </p:txBody>
-      </p:sp>
-      <p:sp>
-        <p:nvSpPr>
-          <p:cNvPr id="41" name="Text 33"/>
-          <p:cNvSpPr/>
-          <p:nvPr/>
-        </p:nvSpPr>
-        <p:spPr>
-          <a:xfrm>
-            <a:off x="410566" y="6575450"/>
-            <a:ext cx="1979676" cy="461772"/>
-          </a:xfrm>
-          <a:prstGeom prst="rect">
-            <a:avLst/>
-          </a:prstGeom>
-          <a:noFill/>
-          <a:ln/>
-        </p:spPr>
-        <p:txBody>
-          <a:bodyPr wrap="square" lIns="0" tIns="0" rIns="0" bIns="0" rtlCol="0" anchor="t"/>
-          <a:lstStyle/>
-          <a:p>
-            <a:pPr algn="l" indent="0" marL="0">
-              <a:lnSpc>
-                <a:spcPct val="110000"/>
-              </a:lnSpc>
-              <a:buNone/>
-            </a:pPr>
-            <a:r>
-              <a:rPr lang="en-US" sz="2000" b="1" dirty="0">
-                <a:solidFill>
-                  <a:srgbClr val="222F44"/>
-                </a:solidFill>
-                <a:latin typeface="Poppins" pitchFamily="34" charset="0"/>
-                <a:ea typeface="Poppins" pitchFamily="34" charset="-122"/>
-                <a:cs typeface="Poppins" pitchFamily="34" charset="-120"/>
-              </a:rPr>
-              <a:t>~35%</a:t>
-            </a:r>
-            <a:endParaRPr lang="en-US" sz="2000" dirty="0"/>
-          </a:p>
-          <a:p>
-            <a:pPr algn="l" indent="0" marL="0">
-              <a:lnSpc>
-                <a:spcPct val="110000"/>
-              </a:lnSpc>
-              <a:buNone/>
-            </a:pPr>
-            <a:r>
-              <a:rPr lang="en-US" sz="1000" b="1" dirty="0">
-                <a:solidFill>
-                  <a:srgbClr val="222F44"/>
-                </a:solidFill>
-                <a:latin typeface="Poppins" pitchFamily="34" charset="0"/>
-                <a:ea typeface="Poppins" pitchFamily="34" charset="-122"/>
-                <a:cs typeface="Poppins" pitchFamily="34" charset="-120"/>
-              </a:rPr>
-              <a:t>Of Brazil’s sugarcane area</a:t>
-            </a:r>
-            <a:endParaRPr lang="en-US" sz="2000" dirty="0"/>
-          </a:p>
-        </p:txBody>
-      </p:sp>
-      <p:sp>
-        <p:nvSpPr>
-          <p:cNvPr id="42" name="Text 34"/>
-          <p:cNvSpPr/>
-          <p:nvPr/>
-        </p:nvSpPr>
-        <p:spPr>
-          <a:xfrm>
-            <a:off x="2518258" y="6575450"/>
-            <a:ext cx="1979676" cy="461772"/>
-          </a:xfrm>
-          <a:prstGeom prst="rect">
-            <a:avLst/>
-          </a:prstGeom>
-          <a:noFill/>
-          <a:ln/>
-        </p:spPr>
-        <p:txBody>
-          <a:bodyPr wrap="square" lIns="0" tIns="0" rIns="0" bIns="0" rtlCol="0" anchor="t"/>
-          <a:lstStyle/>
-          <a:p>
-            <a:pPr algn="l" indent="0" marL="0">
-              <a:lnSpc>
-                <a:spcPct val="110000"/>
-              </a:lnSpc>
-              <a:buNone/>
-            </a:pPr>
-            <a:r>
-              <a:rPr lang="en-US" sz="2000" b="1" dirty="0">
-                <a:solidFill>
-                  <a:srgbClr val="222F44"/>
-                </a:solidFill>
-                <a:latin typeface="Poppins" pitchFamily="34" charset="0"/>
-                <a:ea typeface="Poppins" pitchFamily="34" charset="-122"/>
-                <a:cs typeface="Poppins" pitchFamily="34" charset="-120"/>
-              </a:rPr>
-              <a:t>13</a:t>
-            </a:r>
-            <a:endParaRPr lang="en-US" sz="2000" dirty="0"/>
-          </a:p>
-          <a:p>
-            <a:pPr algn="l" indent="0" marL="0">
-              <a:lnSpc>
-                <a:spcPct val="110000"/>
-              </a:lnSpc>
-              <a:buNone/>
-            </a:pPr>
-            <a:r>
-              <a:rPr lang="en-US" sz="1000" b="1" dirty="0">
-                <a:solidFill>
-                  <a:srgbClr val="222F44"/>
-                </a:solidFill>
-                <a:latin typeface="Poppins" pitchFamily="34" charset="0"/>
-                <a:ea typeface="Poppins" pitchFamily="34" charset="-122"/>
-                <a:cs typeface="Poppins" pitchFamily="34" charset="-120"/>
-              </a:rPr>
-              <a:t>Branches</a:t>
-            </a:r>
-            <a:endParaRPr lang="en-US" sz="2000" dirty="0"/>
-          </a:p>
-        </p:txBody>
-      </p:sp>
-      <p:sp>
-        <p:nvSpPr>
-          <p:cNvPr id="43" name="Text 35"/>
-          <p:cNvSpPr/>
-          <p:nvPr/>
-        </p:nvSpPr>
-        <p:spPr>
-          <a:xfrm>
-            <a:off x="4626864" y="6575450"/>
-            <a:ext cx="1979676" cy="461772"/>
-          </a:xfrm>
-          <a:prstGeom prst="rect">
-            <a:avLst/>
-          </a:prstGeom>
-          <a:noFill/>
-          <a:ln/>
-        </p:spPr>
-        <p:txBody>
-          <a:bodyPr wrap="square" lIns="0" tIns="0" rIns="0" bIns="0" rtlCol="0" anchor="t"/>
-          <a:lstStyle/>
-          <a:p>
-            <a:pPr algn="l" indent="0" marL="0">
-              <a:lnSpc>
-                <a:spcPct val="110000"/>
-              </a:lnSpc>
-              <a:buNone/>
-            </a:pPr>
-            <a:r>
-              <a:rPr lang="en-US" sz="2000" b="1" dirty="0">
-                <a:solidFill>
-                  <a:srgbClr val="222F44"/>
-                </a:solidFill>
-                <a:latin typeface="Poppins" pitchFamily="34" charset="0"/>
-                <a:ea typeface="Poppins" pitchFamily="34" charset="-122"/>
-                <a:cs typeface="Poppins" pitchFamily="34" charset="-120"/>
-              </a:rPr>
-              <a:t>+600</a:t>
-            </a:r>
-            <a:endParaRPr lang="en-US" sz="2000" dirty="0"/>
-          </a:p>
-          <a:p>
-            <a:pPr algn="l" indent="0" marL="0">
-              <a:lnSpc>
-                <a:spcPct val="110000"/>
-              </a:lnSpc>
-              <a:buNone/>
-            </a:pPr>
-            <a:r>
-              <a:rPr lang="en-US" sz="1000" b="1" dirty="0">
-                <a:solidFill>
-                  <a:srgbClr val="222F44"/>
-                </a:solidFill>
-                <a:latin typeface="Poppins" pitchFamily="34" charset="0"/>
-                <a:ea typeface="Poppins" pitchFamily="34" charset="-122"/>
-                <a:cs typeface="Poppins" pitchFamily="34" charset="-120"/>
-              </a:rPr>
-              <a:t>Employees</a:t>
-            </a:r>
-            <a:endParaRPr lang="en-US" sz="2000" dirty="0"/>
-          </a:p>
-        </p:txBody>
-      </p:sp>
-      <p:sp>
-        <p:nvSpPr>
-          <p:cNvPr id="44" name="Text 36"/>
-          <p:cNvSpPr/>
-          <p:nvPr/>
-        </p:nvSpPr>
-        <p:spPr>
-          <a:xfrm>
-            <a:off x="362102" y="7272223"/>
-            <a:ext cx="5767121" cy="162763"/>
-          </a:xfrm>
-          <a:prstGeom prst="rect">
-            <a:avLst/>
-          </a:prstGeom>
-          <a:noFill/>
-          <a:ln/>
-        </p:spPr>
-        <p:txBody>
-          <a:bodyPr wrap="square" lIns="0" tIns="0" rIns="0" bIns="0" rtlCol="0" anchor="t"/>
-          <a:lstStyle/>
-          <a:p>
-            <a:pPr indent="0" marL="0">
-              <a:buNone/>
-            </a:pPr>
-            <a:r>
-              <a:rPr lang="en-US" sz="1000" u="sng" dirty="0">
-                <a:solidFill>
-                  <a:srgbClr val="222F44"/>
-                </a:solidFill>
-                <a:latin typeface="Poppins" pitchFamily="34" charset="0"/>
-                <a:ea typeface="Poppins" pitchFamily="34" charset="-122"/>
-                <a:cs typeface="Poppins" pitchFamily="34" charset="-120"/>
-              </a:rPr>
-              <a:t>For any further questions please contact:</a:t>
+              <a:rPr lang="en-US" sz="1000" dirty="0">
+                <a:solidFill>
+                  <a:srgbClr val="222F44"/>
+                </a:solidFill>
+                <a:latin typeface="Poppins" pitchFamily="34" charset="0"/>
+                <a:ea typeface="Poppins" pitchFamily="34" charset="-122"/>
+                <a:cs typeface="Poppins" pitchFamily="34" charset="-120"/>
+              </a:rPr>
+              <a:t>Pedro.grando@igcp.com.br</a:t>
             </a:r>
             <a:endParaRPr lang="en-US" sz="1000" dirty="0"/>
           </a:p>
-        </p:txBody>
-      </p:sp>
-      <p:sp>
-        <p:nvSpPr>
-          <p:cNvPr id="45" name="Text 37"/>
-          <p:cNvSpPr/>
-          <p:nvPr/>
-        </p:nvSpPr>
-        <p:spPr>
-          <a:xfrm>
-            <a:off x="360274" y="7488022"/>
-            <a:ext cx="1871777" cy="615391"/>
-          </a:xfrm>
-          <a:prstGeom prst="rect">
-            <a:avLst/>
-          </a:prstGeom>
-          <a:noFill/>
-          <a:ln/>
-        </p:spPr>
-        <p:txBody>
-          <a:bodyPr wrap="square" lIns="0" tIns="0" rIns="0" bIns="0" rtlCol="0" anchor="t"/>
-          <a:lstStyle/>
           <a:p>
             <a:pPr indent="0" marL="0">
               <a:lnSpc>
@@ -2611,18 +3144,63 @@
               <a:buNone/>
             </a:pPr>
             <a:r>
-              <a:rPr lang="en-US" sz="1000" b="1" dirty="0">
-                <a:solidFill>
-                  <a:srgbClr val="222F44"/>
-                </a:solidFill>
-                <a:latin typeface="Poppins" pitchFamily="34" charset="0"/>
-                <a:ea typeface="Poppins" pitchFamily="34" charset="-122"/>
-                <a:cs typeface="Poppins" pitchFamily="34" charset="-120"/>
-              </a:rPr>
-              <a:t>Bruno Iervolino</a:t>
+              <a:rPr lang="en-US" sz="1000" dirty="0">
+                <a:solidFill>
+                  <a:srgbClr val="222F44"/>
+                </a:solidFill>
+                <a:latin typeface="Poppins" pitchFamily="34" charset="0"/>
+                <a:ea typeface="Poppins" pitchFamily="34" charset="-122"/>
+                <a:cs typeface="Poppins" pitchFamily="34" charset="-120"/>
+              </a:rPr>
+              <a:t>+55 11 3815 3533</a:t>
             </a:r>
             <a:endParaRPr lang="en-US" sz="1000" dirty="0"/>
           </a:p>
+        </p:txBody>
+      </p:sp>
+      <p:pic>
+        <p:nvPicPr>
+          <p:cNvPr id="56" name="Image 2" descr="assets/green/hero_cane_aerial.png">    </p:cNvPr>
+          <p:cNvPicPr>
+            <a:picLocks noChangeAspect="1"/>
+          </p:cNvPicPr>
+          <p:nvPr/>
+        </p:nvPicPr>
+        <p:blipFill>
+          <a:blip r:embed="rId3"/>
+          <a:srcRect l="0" r="0" t="0" b="0"/>
+          <a:stretch/>
+        </p:blipFill>
+        <p:spPr>
+          <a:xfrm>
+            <a:off x="-274" y="8012613"/>
+            <a:ext cx="6885889" cy="756209"/>
+          </a:xfrm>
+          <a:prstGeom prst="rect">
+            <a:avLst/>
+          </a:prstGeom>
+        </p:spPr>
+      </p:pic>
+      <p:sp>
+        <p:nvSpPr>
+          <p:cNvPr id="57" name="Text 52"/>
+          <p:cNvSpPr/>
+          <p:nvPr/>
+        </p:nvSpPr>
+        <p:spPr>
+          <a:xfrm>
+            <a:off x="360274" y="8783726"/>
+            <a:ext cx="5954573" cy="182880"/>
+          </a:xfrm>
+          <a:prstGeom prst="rect">
+            <a:avLst/>
+          </a:prstGeom>
+          <a:noFill/>
+          <a:ln/>
+        </p:spPr>
+        <p:txBody>
+          <a:bodyPr wrap="square" lIns="0" tIns="0" rIns="0" bIns="0" rtlCol="0" anchor="t"/>
+          <a:lstStyle/>
           <a:p>
             <a:pPr indent="0" marL="0">
               <a:lnSpc>
@@ -2631,19 +3209,16 @@
               <a:buNone/>
             </a:pPr>
             <a:r>
-              <a:rPr lang="en-US" sz="1000" dirty="0">
-                <a:solidFill>
-                  <a:srgbClr val="222F44"/>
-                </a:solidFill>
-                <a:latin typeface="Poppins" pitchFamily="34" charset="0"/>
-                <a:ea typeface="Poppins" pitchFamily="34" charset="-122"/>
-                <a:cs typeface="Poppins" pitchFamily="34" charset="-120"/>
-              </a:rPr>
-              <a:t>Bruno.iervolino@igcp.com.br</a:t>
-            </a:r>
-            <a:endParaRPr lang="en-US" sz="1000" dirty="0"/>
-          </a:p>
-          <a:p>
+              <a:rPr lang="en-US" sz="500" b="1" dirty="0">
+                <a:solidFill>
+                  <a:srgbClr val="222F44"/>
+                </a:solidFill>
+                <a:latin typeface="Poppins" pitchFamily="34" charset="0"/>
+                <a:ea typeface="Poppins" pitchFamily="34" charset="-122"/>
+                <a:cs typeface="Poppins" pitchFamily="34" charset="-120"/>
+              </a:rPr>
+              <a:t>Source: </a:t>
+            </a:r>
             <a:pPr indent="0" marL="0">
               <a:lnSpc>
                 <a:spcPct val="110000"/>
@@ -2651,252 +3226,6 @@
               <a:buNone/>
             </a:pPr>
             <a:r>
-              <a:rPr lang="en-US" sz="1000" dirty="0">
-                <a:solidFill>
-                  <a:srgbClr val="222F44"/>
-                </a:solidFill>
-                <a:latin typeface="Poppins" pitchFamily="34" charset="0"/>
-                <a:ea typeface="Poppins" pitchFamily="34" charset="-122"/>
-                <a:cs typeface="Poppins" pitchFamily="34" charset="-120"/>
-              </a:rPr>
-              <a:t>+55 11 3815 3533</a:t>
-            </a:r>
-            <a:endParaRPr lang="en-US" sz="1000" dirty="0"/>
-          </a:p>
-        </p:txBody>
-      </p:sp>
-      <p:sp>
-        <p:nvSpPr>
-          <p:cNvPr id="46" name="Text 38"/>
-          <p:cNvSpPr/>
-          <p:nvPr/>
-        </p:nvSpPr>
-        <p:spPr>
-          <a:xfrm>
-            <a:off x="2399386" y="7488022"/>
-            <a:ext cx="1871777" cy="615391"/>
-          </a:xfrm>
-          <a:prstGeom prst="rect">
-            <a:avLst/>
-          </a:prstGeom>
-          <a:noFill/>
-          <a:ln/>
-        </p:spPr>
-        <p:txBody>
-          <a:bodyPr wrap="square" lIns="0" tIns="0" rIns="0" bIns="0" rtlCol="0" anchor="t"/>
-          <a:lstStyle/>
-          <a:p>
-            <a:pPr indent="0" marL="0">
-              <a:lnSpc>
-                <a:spcPct val="110000"/>
-              </a:lnSpc>
-              <a:buNone/>
-            </a:pPr>
-            <a:r>
-              <a:rPr lang="en-US" sz="1000" b="1" dirty="0">
-                <a:solidFill>
-                  <a:srgbClr val="222F44"/>
-                </a:solidFill>
-                <a:latin typeface="Poppins" pitchFamily="34" charset="0"/>
-                <a:ea typeface="Poppins" pitchFamily="34" charset="-122"/>
-                <a:cs typeface="Poppins" pitchFamily="34" charset="-120"/>
-              </a:rPr>
-              <a:t>Gabriel Brito</a:t>
-            </a:r>
-            <a:endParaRPr lang="en-US" sz="1000" dirty="0"/>
-          </a:p>
-          <a:p>
-            <a:pPr indent="0" marL="0">
-              <a:lnSpc>
-                <a:spcPct val="110000"/>
-              </a:lnSpc>
-              <a:buNone/>
-            </a:pPr>
-            <a:r>
-              <a:rPr lang="en-US" sz="1000" dirty="0">
-                <a:solidFill>
-                  <a:srgbClr val="222F44"/>
-                </a:solidFill>
-                <a:latin typeface="Poppins" pitchFamily="34" charset="0"/>
-                <a:ea typeface="Poppins" pitchFamily="34" charset="-122"/>
-                <a:cs typeface="Poppins" pitchFamily="34" charset="-120"/>
-              </a:rPr>
-              <a:t>Gabriel.brito@igcp.com.br</a:t>
-            </a:r>
-            <a:endParaRPr lang="en-US" sz="1000" dirty="0"/>
-          </a:p>
-          <a:p>
-            <a:pPr indent="0" marL="0">
-              <a:lnSpc>
-                <a:spcPct val="110000"/>
-              </a:lnSpc>
-              <a:buNone/>
-            </a:pPr>
-            <a:r>
-              <a:rPr lang="en-US" sz="1000" dirty="0">
-                <a:solidFill>
-                  <a:srgbClr val="222F44"/>
-                </a:solidFill>
-                <a:latin typeface="Poppins" pitchFamily="34" charset="0"/>
-                <a:ea typeface="Poppins" pitchFamily="34" charset="-122"/>
-                <a:cs typeface="Poppins" pitchFamily="34" charset="-120"/>
-              </a:rPr>
-              <a:t>+55 11 3815 3533</a:t>
-            </a:r>
-            <a:endParaRPr lang="en-US" sz="1000" dirty="0"/>
-          </a:p>
-        </p:txBody>
-      </p:sp>
-      <p:sp>
-        <p:nvSpPr>
-          <p:cNvPr id="47" name="Text 39"/>
-          <p:cNvSpPr/>
-          <p:nvPr/>
-        </p:nvSpPr>
-        <p:spPr>
-          <a:xfrm>
-            <a:off x="4438498" y="7488022"/>
-            <a:ext cx="1871777" cy="615391"/>
-          </a:xfrm>
-          <a:prstGeom prst="rect">
-            <a:avLst/>
-          </a:prstGeom>
-          <a:noFill/>
-          <a:ln/>
-        </p:spPr>
-        <p:txBody>
-          <a:bodyPr wrap="square" lIns="0" tIns="0" rIns="0" bIns="0" rtlCol="0" anchor="t"/>
-          <a:lstStyle/>
-          <a:p>
-            <a:pPr indent="0" marL="0">
-              <a:lnSpc>
-                <a:spcPct val="110000"/>
-              </a:lnSpc>
-              <a:buNone/>
-            </a:pPr>
-            <a:r>
-              <a:rPr lang="en-US" sz="1000" b="1" dirty="0">
-                <a:solidFill>
-                  <a:srgbClr val="222F44"/>
-                </a:solidFill>
-                <a:latin typeface="Poppins" pitchFamily="34" charset="0"/>
-                <a:ea typeface="Poppins" pitchFamily="34" charset="-122"/>
-                <a:cs typeface="Poppins" pitchFamily="34" charset="-120"/>
-              </a:rPr>
-              <a:t>Pedro Grando</a:t>
-            </a:r>
-            <a:endParaRPr lang="en-US" sz="1000" dirty="0"/>
-          </a:p>
-          <a:p>
-            <a:pPr indent="0" marL="0">
-              <a:lnSpc>
-                <a:spcPct val="110000"/>
-              </a:lnSpc>
-              <a:buNone/>
-            </a:pPr>
-            <a:r>
-              <a:rPr lang="en-US" sz="1000" dirty="0">
-                <a:solidFill>
-                  <a:srgbClr val="222F44"/>
-                </a:solidFill>
-                <a:latin typeface="Poppins" pitchFamily="34" charset="0"/>
-                <a:ea typeface="Poppins" pitchFamily="34" charset="-122"/>
-                <a:cs typeface="Poppins" pitchFamily="34" charset="-120"/>
-              </a:rPr>
-              <a:t>Pedro.grando@igcp.com.br</a:t>
-            </a:r>
-            <a:endParaRPr lang="en-US" sz="1000" dirty="0"/>
-          </a:p>
-          <a:p>
-            <a:pPr indent="0" marL="0">
-              <a:lnSpc>
-                <a:spcPct val="110000"/>
-              </a:lnSpc>
-              <a:buNone/>
-            </a:pPr>
-            <a:r>
-              <a:rPr lang="en-US" sz="1000" dirty="0">
-                <a:solidFill>
-                  <a:srgbClr val="222F44"/>
-                </a:solidFill>
-                <a:latin typeface="Poppins" pitchFamily="34" charset="0"/>
-                <a:ea typeface="Poppins" pitchFamily="34" charset="-122"/>
-                <a:cs typeface="Poppins" pitchFamily="34" charset="-120"/>
-              </a:rPr>
-              <a:t>+55 11 3815 3533</a:t>
-            </a:r>
-            <a:endParaRPr lang="en-US" sz="1000" dirty="0"/>
-          </a:p>
-        </p:txBody>
-      </p:sp>
-      <p:pic>
-        <p:nvPicPr>
-          <p:cNvPr id="48" name="Image 6" descr="assets/green/hero_cane_aerial.png">    </p:cNvPr>
-          <p:cNvPicPr>
-            <a:picLocks noChangeAspect="1"/>
-          </p:cNvPicPr>
-          <p:nvPr/>
-        </p:nvPicPr>
-        <p:blipFill>
-          <a:blip r:embed="rId7"/>
-          <a:srcRect l="0" r="0" t="0" b="0"/>
-          <a:stretch/>
-        </p:blipFill>
-        <p:spPr>
-          <a:xfrm>
-            <a:off x="-274" y="8012613"/>
-            <a:ext cx="6885889" cy="756209"/>
-          </a:xfrm>
-          <a:prstGeom prst="rect">
-            <a:avLst/>
-          </a:prstGeom>
-        </p:spPr>
-      </p:pic>
-      <p:sp>
-        <p:nvSpPr>
-          <p:cNvPr id="49" name="Text 40"/>
-          <p:cNvSpPr/>
-          <p:nvPr/>
-        </p:nvSpPr>
-        <p:spPr>
-          <a:xfrm>
-            <a:off x="360274" y="8789213"/>
-            <a:ext cx="5954573" cy="173736"/>
-          </a:xfrm>
-          <a:prstGeom prst="rect">
-            <a:avLst/>
-          </a:prstGeom>
-          <a:noFill/>
-          <a:ln/>
-        </p:spPr>
-        <p:txBody>
-          <a:bodyPr wrap="square" lIns="0" tIns="0" rIns="0" bIns="0" rtlCol="0" anchor="t"/>
-          <a:lstStyle/>
-          <a:p>
-            <a:pPr indent="0" marL="0">
-              <a:lnSpc>
-                <a:spcPct val="110000"/>
-              </a:lnSpc>
-              <a:buNone/>
-            </a:pPr>
-            <a:r>
-              <a:rPr lang="en-US" sz="500" b="1" dirty="0">
-                <a:solidFill>
-                  <a:srgbClr val="222F44"/>
-                </a:solidFill>
-                <a:latin typeface="Poppins" pitchFamily="34" charset="0"/>
-                <a:ea typeface="Poppins" pitchFamily="34" charset="-122"/>
-                <a:cs typeface="Poppins" pitchFamily="34" charset="-120"/>
-              </a:rPr>
-              <a:t>Source: </a:t>
-            </a:r>
-            <a:pPr indent="0" marL="0">
-              <a:lnSpc>
-                <a:spcPct val="110000"/>
-              </a:lnSpc>
-              <a:buNone/>
-            </a:pPr>
-            <a:r>
               <a:rPr lang="en-US" sz="500" dirty="0">
                 <a:solidFill>
                   <a:srgbClr val="222F44"/>
@@ -2905,7 +3234,7 @@
                 <a:ea typeface="Poppins" pitchFamily="34" charset="-122"/>
                 <a:cs typeface="Poppins" pitchFamily="34" charset="-120"/>
               </a:rPr>
-              <a:t>Company management information; Company presentation (2026). (1) 2025 net revenues of BRL 1,360 Mn and EBITDA of BRL 58 Mn (4.2% margin); area of operation = 3.7 Mn ha of crop area, of which ~75% sugarcane — state coverage to be confirmed with management.</a:t>
+              <a:t>Information Memorandum (Jul-2026) and Company materials. (1) Sum of two separately reported perimeters: heavy equipment BRL 1,200 Mn / BRL 65 Mn and agriculture BRL 1,360 Mn / BRL 58 Mn (net revenues / EBITDA); not audited consolidated. (2) 23 + 13 locations; 470 + 600 employees; overlap to be confirmed.</a:t>
             </a:r>
             <a:endParaRPr lang="en-US" sz="500" dirty="0"/>
           </a:p>
@@ -2913,7 +3242,7 @@
       </p:sp>
       <p:sp>
         <p:nvSpPr>
-          <p:cNvPr id="50" name="Text 41"/>
+          <p:cNvPr id="58" name="Text 53"/>
           <p:cNvSpPr/>
           <p:nvPr/>
         </p:nvSpPr>
@@ -2952,7 +3281,7 @@
       </p:sp>
       <p:sp>
         <p:nvSpPr>
-          <p:cNvPr id="51" name="Text 42"/>
+          <p:cNvPr id="59" name="Text 54"/>
           <p:cNvSpPr/>
           <p:nvPr/>
         </p:nvSpPr>
